--- a/docs/Presentacion-Virthub-2.0.pptx
+++ b/docs/Presentacion-Virthub-2.0.pptx
@@ -30,6 +30,8 @@
     <p:sldId id="278" r:id="rId29"/>
     <p:sldId id="279" r:id="rId30"/>
     <p:sldId id="280" r:id="rId31"/>
+    <p:sldId id="281" r:id="rId32"/>
+    <p:sldId id="282" r:id="rId33"/>
   </p:sldIdLst>
   <p:sldSz cx="12191695" cy="6858000" type="screen4x3"/>
   <p:notesSz cx="6858000" cy="9144000"/>
@@ -3233,7 +3235,7 @@
                 </a:solidFill>
                 <a:latin typeface="Segoe UI"/>
               </a:rPr>
-              <a:t>UNIVERSIDAD TECNOLÓGICA DE TULA-TEPEJI</a:t>
+              <a:t>UNIVERSIDAD TECNOLÓGICA DE TECÁMAC</a:t>
             </a:r>
           </a:p>
         </p:txBody>
@@ -9797,7 +9799,7 @@
                 </a:solidFill>
                 <a:latin typeface="Segoe UI Semibold"/>
               </a:rPr>
-              <a:t>El asistente TutorUTT</a:t>
+              <a:t>¿Por qué Redmond?</a:t>
             </a:r>
           </a:p>
         </p:txBody>
@@ -9836,7 +9838,7 @@
                 </a:solidFill>
                 <a:latin typeface="Segoe UI"/>
               </a:rPr>
-              <a:t>IA local, sin mandar nada a internet</a:t>
+              <a:t>Una decisión de diseño, no un capricho</a:t>
             </a:r>
           </a:p>
         </p:txBody>
@@ -9882,172 +9884,26 @@
       </p:sp>
       <p:sp>
         <p:nvSpPr>
-          <p:cNvPr id="7" name="TextBox 6"/>
-          <p:cNvSpPr txBox="1"/>
-          <p:nvPr/>
-        </p:nvSpPr>
-        <p:spPr>
-          <a:xfrm>
-            <a:off x="960120" y="1691640"/>
-            <a:ext cx="10332720" cy="3291840"/>
-          </a:xfrm>
-          <a:prstGeom prst="rect">
-            <a:avLst/>
-          </a:prstGeom>
-          <a:noFill/>
-        </p:spPr>
-        <p:txBody>
-          <a:bodyPr wrap="square">
-            <a:spAutoFit/>
-          </a:bodyPr>
-          <a:lstStyle/>
-          <a:p>
-            <a:pPr>
-              <a:spcAft>
-                <a:spcPts val="1000"/>
-              </a:spcAft>
-            </a:pPr>
-            <a:r>
-              <a:rPr sz="1700">
-                <a:solidFill>
-                  <a:srgbClr val="3FC19F"/>
-                </a:solidFill>
-                <a:latin typeface="Segoe UI"/>
-              </a:rPr>
-              <a:t>▸  </a:t>
-            </a:r>
-            <a:r>
-              <a:rPr sz="1700">
-                <a:solidFill>
-                  <a:srgbClr val="F2F7F5"/>
-                </a:solidFill>
-                <a:latin typeface="Segoe UI"/>
-              </a:rPr>
-              <a:t>El modelo corre en el equipo del administrador, con Ollama.</a:t>
-            </a:r>
-          </a:p>
-          <a:p>
-            <a:pPr>
-              <a:spcAft>
-                <a:spcPts val="1000"/>
-              </a:spcAft>
-            </a:pPr>
-            <a:r>
-              <a:rPr sz="1700">
-                <a:solidFill>
-                  <a:srgbClr val="3FC19F"/>
-                </a:solidFill>
-                <a:latin typeface="Segoe UI"/>
-              </a:rPr>
-              <a:t>▸  </a:t>
-            </a:r>
-            <a:r>
-              <a:rPr sz="1700">
-                <a:solidFill>
-                  <a:srgbClr val="F2F7F5"/>
-                </a:solidFill>
-                <a:latin typeface="Segoe UI"/>
-              </a:rPr>
-              <a:t>Ayuda con las materias de la carrera: explica, ejemplifica y propone ejercicios.</a:t>
-            </a:r>
-          </a:p>
-          <a:p>
-            <a:pPr>
-              <a:spcAft>
-                <a:spcPts val="1000"/>
-              </a:spcAft>
-            </a:pPr>
-            <a:r>
-              <a:rPr sz="1700">
-                <a:solidFill>
-                  <a:srgbClr val="3FC19F"/>
-                </a:solidFill>
-                <a:latin typeface="Segoe UI"/>
-              </a:rPr>
-              <a:t>▸  </a:t>
-            </a:r>
-            <a:r>
-              <a:rPr sz="1700">
-                <a:solidFill>
-                  <a:srgbClr val="F2F7F5"/>
-                </a:solidFill>
-                <a:latin typeface="Segoe UI"/>
-              </a:rPr>
-              <a:t>Las preguntas no salen de la universidad.</a:t>
-            </a:r>
-          </a:p>
-          <a:p>
-            <a:pPr>
-              <a:spcAft>
-                <a:spcPts val="1000"/>
-              </a:spcAft>
-            </a:pPr>
-            <a:r>
-              <a:rPr sz="1700">
-                <a:solidFill>
-                  <a:srgbClr val="3FC19F"/>
-                </a:solidFill>
-                <a:latin typeface="Segoe UI"/>
-              </a:rPr>
-              <a:t>▸  </a:t>
-            </a:r>
-            <a:r>
-              <a:rPr sz="1700">
-                <a:solidFill>
-                  <a:srgbClr val="F2F7F5"/>
-                </a:solidFill>
-                <a:latin typeface="Segoe UI"/>
-              </a:rPr>
-              <a:t>El panel muestra el uso de la tarjeta gráfica en vivo.</a:t>
-            </a:r>
-          </a:p>
-          <a:p>
-            <a:pPr>
-              <a:spcAft>
-                <a:spcPts val="1000"/>
-              </a:spcAft>
-            </a:pPr>
-            <a:r>
-              <a:rPr sz="1700">
-                <a:solidFill>
-                  <a:srgbClr val="3FC19F"/>
-                </a:solidFill>
-                <a:latin typeface="Segoe UI"/>
-              </a:rPr>
-              <a:t>▸  </a:t>
-            </a:r>
-            <a:r>
-              <a:rPr sz="1700">
-                <a:solidFill>
-                  <a:srgbClr val="F2F7F5"/>
-                </a:solidFill>
-                <a:latin typeface="Segoe UI"/>
-              </a:rPr>
-              <a:t>Hoy está habilitado solo para el administrador.</a:t>
-            </a:r>
-          </a:p>
-        </p:txBody>
-      </p:sp>
-      <p:sp>
-        <p:nvSpPr>
-          <p:cNvPr id="9" name="Rounded Rectangle 8"/>
+          <p:cNvPr id="7" name="Rounded Rectangle 6"/>
           <p:cNvSpPr/>
           <p:nvPr/>
         </p:nvSpPr>
         <p:spPr>
           <a:xfrm>
-            <a:off x="8702867" y="1655064"/>
-            <a:ext cx="2528185" cy="4096512"/>
+            <a:off x="685800" y="1783080"/>
+            <a:ext cx="2651760" cy="1965960"/>
           </a:xfrm>
           <a:prstGeom prst="roundRect">
             <a:avLst>
-              <a:gd name="adj" fmla="val 3000"/>
+              <a:gd name="adj" fmla="val 8000"/>
             </a:avLst>
           </a:prstGeom>
-          <a:noFill/>
-          <a:ln w="12700">
+          <a:solidFill>
+            <a:srgbClr val="132A26"/>
+          </a:solidFill>
+          <a:ln w="15875">
             <a:solidFill>
-              <a:srgbClr val="1F6F5C"/>
+              <a:srgbClr val="3FC19F"/>
             </a:solidFill>
           </a:ln>
           <a:effectLst/>
@@ -10074,30 +9930,604 @@
           </a:p>
         </p:txBody>
       </p:sp>
-      <p:pic>
-        <p:nvPicPr>
-          <p:cNvPr id="8" name="Picture 7" descr="13-ia-tutorutt.png"/>
-          <p:cNvPicPr>
-            <a:picLocks noChangeAspect="1"/>
-          </p:cNvPicPr>
-          <p:nvPr/>
-        </p:nvPicPr>
-        <p:blipFill>
-          <a:blip r:embed="rId2"/>
-          <a:stretch>
-            <a:fillRect/>
-          </a:stretch>
-        </p:blipFill>
-        <p:spPr>
-          <a:xfrm>
-            <a:off x="8739443" y="1691640"/>
-            <a:ext cx="2455033" cy="4023360"/>
-          </a:xfrm>
-          <a:prstGeom prst="rect">
-            <a:avLst/>
-          </a:prstGeom>
-        </p:spPr>
-      </p:pic>
+      <p:sp>
+        <p:nvSpPr>
+          <p:cNvPr id="8" name="TextBox 7"/>
+          <p:cNvSpPr txBox="1"/>
+          <p:nvPr/>
+        </p:nvSpPr>
+        <p:spPr>
+          <a:xfrm>
+            <a:off x="886968" y="1947672"/>
+            <a:ext cx="2249424" cy="457200"/>
+          </a:xfrm>
+          <a:prstGeom prst="rect">
+            <a:avLst/>
+          </a:prstGeom>
+          <a:noFill/>
+        </p:spPr>
+        <p:txBody>
+          <a:bodyPr wrap="square" anchor="t">
+            <a:spAutoFit/>
+          </a:bodyPr>
+          <a:lstStyle/>
+          <a:p>
+            <a:pPr algn="l">
+              <a:spcAft>
+                <a:spcPts val="600"/>
+              </a:spcAft>
+            </a:pPr>
+            <a:r>
+              <a:rPr sz="1400" b="1">
+                <a:solidFill>
+                  <a:srgbClr val="3FC19F"/>
+                </a:solidFill>
+                <a:latin typeface="Segoe UI"/>
+              </a:rPr>
+              <a:t>Ya lo conocemos</a:t>
+            </a:r>
+          </a:p>
+        </p:txBody>
+      </p:sp>
+      <p:sp>
+        <p:nvSpPr>
+          <p:cNvPr id="9" name="TextBox 8"/>
+          <p:cNvSpPr txBox="1"/>
+          <p:nvPr/>
+        </p:nvSpPr>
+        <p:spPr>
+          <a:xfrm>
+            <a:off x="886968" y="2441448"/>
+            <a:ext cx="2249424" cy="1143000"/>
+          </a:xfrm>
+          <a:prstGeom prst="rect">
+            <a:avLst/>
+          </a:prstGeom>
+          <a:noFill/>
+        </p:spPr>
+        <p:txBody>
+          <a:bodyPr wrap="square" anchor="t">
+            <a:spAutoFit/>
+          </a:bodyPr>
+          <a:lstStyle/>
+          <a:p>
+            <a:pPr algn="l">
+              <a:spcAft>
+                <a:spcPts val="400"/>
+              </a:spcAft>
+            </a:pPr>
+            <a:r>
+              <a:rPr sz="1100" b="0">
+                <a:solidFill>
+                  <a:srgbClr val="F2F7F5"/>
+                </a:solidFill>
+                <a:latin typeface="Segoe UI"/>
+              </a:rPr>
+              <a:t>Aprendimos a usar una computadora en XP, Vista o 7.</a:t>
+            </a:r>
+          </a:p>
+          <a:p>
+            <a:pPr algn="l">
+              <a:spcAft>
+                <a:spcPts val="400"/>
+              </a:spcAft>
+            </a:pPr>
+            <a:r>
+              <a:rPr sz="1100" b="0">
+                <a:solidFill>
+                  <a:srgbClr val="F2F7F5"/>
+                </a:solidFill>
+                <a:latin typeface="Segoe UI"/>
+              </a:rPr>
+              <a:t>La barra, el cristal y los botones no se estudian: se reconocen.</a:t>
+            </a:r>
+          </a:p>
+        </p:txBody>
+      </p:sp>
+      <p:sp>
+        <p:nvSpPr>
+          <p:cNvPr id="10" name="Rounded Rectangle 9"/>
+          <p:cNvSpPr/>
+          <p:nvPr/>
+        </p:nvSpPr>
+        <p:spPr>
+          <a:xfrm>
+            <a:off x="3520440" y="1783080"/>
+            <a:ext cx="2651760" cy="1965960"/>
+          </a:xfrm>
+          <a:prstGeom prst="roundRect">
+            <a:avLst>
+              <a:gd name="adj" fmla="val 8000"/>
+            </a:avLst>
+          </a:prstGeom>
+          <a:solidFill>
+            <a:srgbClr val="132A26"/>
+          </a:solidFill>
+          <a:ln w="15875">
+            <a:solidFill>
+              <a:srgbClr val="3FC19F"/>
+            </a:solidFill>
+          </a:ln>
+          <a:effectLst/>
+        </p:spPr>
+        <p:style>
+          <a:lnRef idx="1">
+            <a:schemeClr val="accent1"/>
+          </a:lnRef>
+          <a:fillRef idx="3">
+            <a:schemeClr val="accent1"/>
+          </a:fillRef>
+          <a:effectRef idx="2">
+            <a:schemeClr val="accent1"/>
+          </a:effectRef>
+          <a:fontRef idx="minor">
+            <a:schemeClr val="lt1"/>
+          </a:fontRef>
+        </p:style>
+        <p:txBody>
+          <a:bodyPr rtlCol="0" anchor="ctr"/>
+          <a:lstStyle/>
+          <a:p>
+            <a:pPr algn="ctr"/>
+          </a:p>
+        </p:txBody>
+      </p:sp>
+      <p:sp>
+        <p:nvSpPr>
+          <p:cNvPr id="11" name="TextBox 10"/>
+          <p:cNvSpPr txBox="1"/>
+          <p:nvPr/>
+        </p:nvSpPr>
+        <p:spPr>
+          <a:xfrm>
+            <a:off x="3721608" y="1947672"/>
+            <a:ext cx="2249424" cy="457200"/>
+          </a:xfrm>
+          <a:prstGeom prst="rect">
+            <a:avLst/>
+          </a:prstGeom>
+          <a:noFill/>
+        </p:spPr>
+        <p:txBody>
+          <a:bodyPr wrap="square" anchor="t">
+            <a:spAutoFit/>
+          </a:bodyPr>
+          <a:lstStyle/>
+          <a:p>
+            <a:pPr algn="l">
+              <a:spcAft>
+                <a:spcPts val="600"/>
+              </a:spcAft>
+            </a:pPr>
+            <a:r>
+              <a:rPr sz="1400" b="1">
+                <a:solidFill>
+                  <a:srgbClr val="3FC19F"/>
+                </a:solidFill>
+                <a:latin typeface="Segoe UI"/>
+              </a:rPr>
+              <a:t>Nada que aprender</a:t>
+            </a:r>
+          </a:p>
+        </p:txBody>
+      </p:sp>
+      <p:sp>
+        <p:nvSpPr>
+          <p:cNvPr id="12" name="TextBox 11"/>
+          <p:cNvSpPr txBox="1"/>
+          <p:nvPr/>
+        </p:nvSpPr>
+        <p:spPr>
+          <a:xfrm>
+            <a:off x="3721608" y="2441448"/>
+            <a:ext cx="2249424" cy="1143000"/>
+          </a:xfrm>
+          <a:prstGeom prst="rect">
+            <a:avLst/>
+          </a:prstGeom>
+          <a:noFill/>
+        </p:spPr>
+        <p:txBody>
+          <a:bodyPr wrap="square" anchor="t">
+            <a:spAutoFit/>
+          </a:bodyPr>
+          <a:lstStyle/>
+          <a:p>
+            <a:pPr algn="l">
+              <a:spcAft>
+                <a:spcPts val="400"/>
+              </a:spcAft>
+            </a:pPr>
+            <a:r>
+              <a:rPr sz="1100" b="0">
+                <a:solidFill>
+                  <a:srgbClr val="F2F7F5"/>
+                </a:solidFill>
+                <a:latin typeface="Segoe UI"/>
+              </a:rPr>
+              <a:t>La interfaz no compite con el contenido.</a:t>
+            </a:r>
+          </a:p>
+          <a:p>
+            <a:pPr algn="l">
+              <a:spcAft>
+                <a:spcPts val="400"/>
+              </a:spcAft>
+            </a:pPr>
+            <a:r>
+              <a:rPr sz="1100" b="0">
+                <a:solidFill>
+                  <a:srgbClr val="F2F7F5"/>
+                </a:solidFill>
+                <a:latin typeface="Segoe UI"/>
+              </a:rPr>
+              <a:t>El estudiante entra a trabajar, no a descubrir un sistema.</a:t>
+            </a:r>
+          </a:p>
+        </p:txBody>
+      </p:sp>
+      <p:sp>
+        <p:nvSpPr>
+          <p:cNvPr id="13" name="Rounded Rectangle 12"/>
+          <p:cNvSpPr/>
+          <p:nvPr/>
+        </p:nvSpPr>
+        <p:spPr>
+          <a:xfrm>
+            <a:off x="6355080" y="1783080"/>
+            <a:ext cx="2651760" cy="1965960"/>
+          </a:xfrm>
+          <a:prstGeom prst="roundRect">
+            <a:avLst>
+              <a:gd name="adj" fmla="val 8000"/>
+            </a:avLst>
+          </a:prstGeom>
+          <a:solidFill>
+            <a:srgbClr val="132A26"/>
+          </a:solidFill>
+          <a:ln w="15875">
+            <a:solidFill>
+              <a:srgbClr val="3FC19F"/>
+            </a:solidFill>
+          </a:ln>
+          <a:effectLst/>
+        </p:spPr>
+        <p:style>
+          <a:lnRef idx="1">
+            <a:schemeClr val="accent1"/>
+          </a:lnRef>
+          <a:fillRef idx="3">
+            <a:schemeClr val="accent1"/>
+          </a:fillRef>
+          <a:effectRef idx="2">
+            <a:schemeClr val="accent1"/>
+          </a:effectRef>
+          <a:fontRef idx="minor">
+            <a:schemeClr val="lt1"/>
+          </a:fontRef>
+        </p:style>
+        <p:txBody>
+          <a:bodyPr rtlCol="0" anchor="ctr"/>
+          <a:lstStyle/>
+          <a:p>
+            <a:pPr algn="ctr"/>
+          </a:p>
+        </p:txBody>
+      </p:sp>
+      <p:sp>
+        <p:nvSpPr>
+          <p:cNvPr id="14" name="TextBox 13"/>
+          <p:cNvSpPr txBox="1"/>
+          <p:nvPr/>
+        </p:nvSpPr>
+        <p:spPr>
+          <a:xfrm>
+            <a:off x="6556248" y="1947672"/>
+            <a:ext cx="2249424" cy="457200"/>
+          </a:xfrm>
+          <a:prstGeom prst="rect">
+            <a:avLst/>
+          </a:prstGeom>
+          <a:noFill/>
+        </p:spPr>
+        <p:txBody>
+          <a:bodyPr wrap="square" anchor="t">
+            <a:spAutoFit/>
+          </a:bodyPr>
+          <a:lstStyle/>
+          <a:p>
+            <a:pPr algn="l">
+              <a:spcAft>
+                <a:spcPts val="600"/>
+              </a:spcAft>
+            </a:pPr>
+            <a:r>
+              <a:rPr sz="1400" b="1">
+                <a:solidFill>
+                  <a:srgbClr val="3FC19F"/>
+                </a:solidFill>
+                <a:latin typeface="Segoe UI"/>
+              </a:rPr>
+              <a:t>Coherente</a:t>
+            </a:r>
+          </a:p>
+        </p:txBody>
+      </p:sp>
+      <p:sp>
+        <p:nvSpPr>
+          <p:cNvPr id="15" name="TextBox 14"/>
+          <p:cNvSpPr txBox="1"/>
+          <p:nvPr/>
+        </p:nvSpPr>
+        <p:spPr>
+          <a:xfrm>
+            <a:off x="6556248" y="2441448"/>
+            <a:ext cx="2249424" cy="1143000"/>
+          </a:xfrm>
+          <a:prstGeom prst="rect">
+            <a:avLst/>
+          </a:prstGeom>
+          <a:noFill/>
+        </p:spPr>
+        <p:txBody>
+          <a:bodyPr wrap="square" anchor="t">
+            <a:spAutoFit/>
+          </a:bodyPr>
+          <a:lstStyle/>
+          <a:p>
+            <a:pPr algn="l">
+              <a:spcAft>
+                <a:spcPts val="400"/>
+              </a:spcAft>
+            </a:pPr>
+            <a:r>
+              <a:rPr sz="1100" b="0">
+                <a:solidFill>
+                  <a:srgbClr val="F2F7F5"/>
+                </a:solidFill>
+                <a:latin typeface="Segoe UI"/>
+              </a:rPr>
+              <a:t>Bordes, degradados y tipografía.</a:t>
+            </a:r>
+          </a:p>
+          <a:p>
+            <a:pPr algn="l">
+              <a:spcAft>
+                <a:spcPts val="400"/>
+              </a:spcAft>
+            </a:pPr>
+            <a:r>
+              <a:rPr sz="1100" b="0">
+                <a:solidFill>
+                  <a:srgbClr val="F2F7F5"/>
+                </a:solidFill>
+                <a:latin typeface="Segoe UI"/>
+              </a:rPr>
+              <a:t>Nada que pida una tarjeta gráfica moderna.</a:t>
+            </a:r>
+          </a:p>
+        </p:txBody>
+      </p:sp>
+      <p:sp>
+        <p:nvSpPr>
+          <p:cNvPr id="16" name="Rounded Rectangle 15"/>
+          <p:cNvSpPr/>
+          <p:nvPr/>
+        </p:nvSpPr>
+        <p:spPr>
+          <a:xfrm>
+            <a:off x="9189720" y="1783080"/>
+            <a:ext cx="2377440" cy="1965960"/>
+          </a:xfrm>
+          <a:prstGeom prst="roundRect">
+            <a:avLst>
+              <a:gd name="adj" fmla="val 8000"/>
+            </a:avLst>
+          </a:prstGeom>
+          <a:solidFill>
+            <a:srgbClr val="132A26"/>
+          </a:solidFill>
+          <a:ln w="15875">
+            <a:solidFill>
+              <a:srgbClr val="E8A33D"/>
+            </a:solidFill>
+          </a:ln>
+          <a:effectLst/>
+        </p:spPr>
+        <p:style>
+          <a:lnRef idx="1">
+            <a:schemeClr val="accent1"/>
+          </a:lnRef>
+          <a:fillRef idx="3">
+            <a:schemeClr val="accent1"/>
+          </a:fillRef>
+          <a:effectRef idx="2">
+            <a:schemeClr val="accent1"/>
+          </a:effectRef>
+          <a:fontRef idx="minor">
+            <a:schemeClr val="lt1"/>
+          </a:fontRef>
+        </p:style>
+        <p:txBody>
+          <a:bodyPr rtlCol="0" anchor="ctr"/>
+          <a:lstStyle/>
+          <a:p>
+            <a:pPr algn="ctr"/>
+          </a:p>
+        </p:txBody>
+      </p:sp>
+      <p:sp>
+        <p:nvSpPr>
+          <p:cNvPr id="17" name="TextBox 16"/>
+          <p:cNvSpPr txBox="1"/>
+          <p:nvPr/>
+        </p:nvSpPr>
+        <p:spPr>
+          <a:xfrm>
+            <a:off x="9390888" y="1947672"/>
+            <a:ext cx="1975104" cy="457200"/>
+          </a:xfrm>
+          <a:prstGeom prst="rect">
+            <a:avLst/>
+          </a:prstGeom>
+          <a:noFill/>
+        </p:spPr>
+        <p:txBody>
+          <a:bodyPr wrap="square" anchor="t">
+            <a:spAutoFit/>
+          </a:bodyPr>
+          <a:lstStyle/>
+          <a:p>
+            <a:pPr algn="l">
+              <a:spcAft>
+                <a:spcPts val="600"/>
+              </a:spcAft>
+            </a:pPr>
+            <a:r>
+              <a:rPr sz="1400" b="1">
+                <a:solidFill>
+                  <a:srgbClr val="E8A33D"/>
+                </a:solidFill>
+                <a:latin typeface="Segoe UI"/>
+              </a:rPr>
+              <a:t>Un homenaje</a:t>
+            </a:r>
+          </a:p>
+        </p:txBody>
+      </p:sp>
+      <p:sp>
+        <p:nvSpPr>
+          <p:cNvPr id="18" name="TextBox 17"/>
+          <p:cNvSpPr txBox="1"/>
+          <p:nvPr/>
+        </p:nvSpPr>
+        <p:spPr>
+          <a:xfrm>
+            <a:off x="9390888" y="2441448"/>
+            <a:ext cx="1975104" cy="1143000"/>
+          </a:xfrm>
+          <a:prstGeom prst="rect">
+            <a:avLst/>
+          </a:prstGeom>
+          <a:noFill/>
+        </p:spPr>
+        <p:txBody>
+          <a:bodyPr wrap="square" anchor="t">
+            <a:spAutoFit/>
+          </a:bodyPr>
+          <a:lstStyle/>
+          <a:p>
+            <a:pPr algn="l">
+              <a:spcAft>
+                <a:spcPts val="400"/>
+              </a:spcAft>
+            </a:pPr>
+            <a:r>
+              <a:rPr sz="1100" b="0">
+                <a:solidFill>
+                  <a:srgbClr val="F2F7F5"/>
+                </a:solidFill>
+                <a:latin typeface="Segoe UI"/>
+              </a:rPr>
+              <a:t>Se ve como la computadora que inspiró el proyecto.</a:t>
+            </a:r>
+          </a:p>
+        </p:txBody>
+      </p:sp>
+      <p:sp>
+        <p:nvSpPr>
+          <p:cNvPr id="19" name="TextBox 18"/>
+          <p:cNvSpPr txBox="1"/>
+          <p:nvPr/>
+        </p:nvSpPr>
+        <p:spPr>
+          <a:xfrm>
+            <a:off x="868680" y="4160520"/>
+            <a:ext cx="10515600" cy="1280160"/>
+          </a:xfrm>
+          <a:prstGeom prst="rect">
+            <a:avLst/>
+          </a:prstGeom>
+          <a:noFill/>
+        </p:spPr>
+        <p:txBody>
+          <a:bodyPr wrap="square" anchor="t">
+            <a:spAutoFit/>
+          </a:bodyPr>
+          <a:lstStyle/>
+          <a:p>
+            <a:pPr algn="ctr">
+              <a:spcAft>
+                <a:spcPts val="400"/>
+              </a:spcAft>
+            </a:pPr>
+            <a:r>
+              <a:rPr sz="2000" b="1">
+                <a:solidFill>
+                  <a:srgbClr val="3FC19F"/>
+                </a:solidFill>
+                <a:latin typeface="Segoe UI"/>
+              </a:rPr>
+              <a:t>Sería incoherente vestir con un diseño que exige una pantalla nueva</a:t>
+            </a:r>
+          </a:p>
+          <a:p>
+            <a:pPr algn="ctr">
+              <a:spcAft>
+                <a:spcPts val="400"/>
+              </a:spcAft>
+            </a:pPr>
+            <a:r>
+              <a:rPr sz="2000" b="1">
+                <a:solidFill>
+                  <a:srgbClr val="3FC19F"/>
+                </a:solidFill>
+                <a:latin typeface="Segoe UI"/>
+              </a:rPr>
+              <a:t>un proyecto hecho para quien no puede cambiar de computadora.</a:t>
+            </a:r>
+          </a:p>
+        </p:txBody>
+      </p:sp>
+      <p:sp>
+        <p:nvSpPr>
+          <p:cNvPr id="20" name="TextBox 19"/>
+          <p:cNvSpPr txBox="1"/>
+          <p:nvPr/>
+        </p:nvSpPr>
+        <p:spPr>
+          <a:xfrm>
+            <a:off x="868680" y="5486400"/>
+            <a:ext cx="10515600" cy="548640"/>
+          </a:xfrm>
+          <a:prstGeom prst="rect">
+            <a:avLst/>
+          </a:prstGeom>
+          <a:noFill/>
+        </p:spPr>
+        <p:txBody>
+          <a:bodyPr wrap="square" anchor="t">
+            <a:spAutoFit/>
+          </a:bodyPr>
+          <a:lstStyle/>
+          <a:p>
+            <a:pPr algn="ctr">
+              <a:spcAft>
+                <a:spcPts val="600"/>
+              </a:spcAft>
+            </a:pPr>
+            <a:r>
+              <a:rPr sz="1300" b="0">
+                <a:solidFill>
+                  <a:srgbClr val="9FB4AE"/>
+                </a:solidFill>
+                <a:latin typeface="Segoe UI"/>
+              </a:rPr>
+              <a:t>La nostalgia aquí no es decoración: es una forma de decir que ese equipo, y quien lo usa, todavía tienen lugar.</a:t>
+            </a:r>
+          </a:p>
+        </p:txBody>
+      </p:sp>
     </p:spTree>
   </p:cSld>
   <p:clrMapOvr>
@@ -10237,7 +10667,7 @@
                 </a:solidFill>
                 <a:latin typeface="Segoe UI Semibold"/>
               </a:rPr>
-              <a:t>El chat</a:t>
+              <a:t>De la 1.0 a la 2.0</a:t>
             </a:r>
           </a:p>
         </p:txBody>
@@ -10276,7 +10706,7 @@
                 </a:solidFill>
                 <a:latin typeface="Segoe UI"/>
               </a:rPr>
-              <a:t>Conversación entre estudiantes</a:t>
+              <a:t>Lo que trajo esta versión</a:t>
             </a:r>
           </a:p>
         </p:txBody>
@@ -10322,197 +10752,26 @@
       </p:sp>
       <p:sp>
         <p:nvSpPr>
-          <p:cNvPr id="7" name="TextBox 6"/>
-          <p:cNvSpPr txBox="1"/>
-          <p:nvPr/>
-        </p:nvSpPr>
-        <p:spPr>
-          <a:xfrm>
-            <a:off x="960120" y="1691640"/>
-            <a:ext cx="10332720" cy="3931920"/>
-          </a:xfrm>
-          <a:prstGeom prst="rect">
-            <a:avLst/>
-          </a:prstGeom>
-          <a:noFill/>
-        </p:spPr>
-        <p:txBody>
-          <a:bodyPr wrap="square">
-            <a:spAutoFit/>
-          </a:bodyPr>
-          <a:lstStyle/>
-          <a:p>
-            <a:pPr>
-              <a:spcAft>
-                <a:spcPts val="1000"/>
-              </a:spcAft>
-            </a:pPr>
-            <a:r>
-              <a:rPr sz="1600">
-                <a:solidFill>
-                  <a:srgbClr val="3FC19F"/>
-                </a:solidFill>
-                <a:latin typeface="Segoe UI"/>
-              </a:rPr>
-              <a:t>▸  </a:t>
-            </a:r>
-            <a:r>
-              <a:rPr sz="1600">
-                <a:solidFill>
-                  <a:srgbClr val="F2F7F5"/>
-                </a:solidFill>
-                <a:latin typeface="Segoe UI"/>
-              </a:rPr>
-              <a:t>Se abre desde cualquier página, y siempre en la lista de usuarios.</a:t>
-            </a:r>
-          </a:p>
-          <a:p>
-            <a:pPr>
-              <a:spcAft>
-                <a:spcPts val="1000"/>
-              </a:spcAft>
-            </a:pPr>
-            <a:r>
-              <a:rPr sz="1600">
-                <a:solidFill>
-                  <a:srgbClr val="3FC19F"/>
-                </a:solidFill>
-                <a:latin typeface="Segoe UI"/>
-              </a:rPr>
-              <a:t>▸  </a:t>
-            </a:r>
-            <a:r>
-              <a:rPr sz="1600">
-                <a:solidFill>
-                  <a:srgbClr val="F2F7F5"/>
-                </a:solidFill>
-                <a:latin typeface="Segoe UI"/>
-              </a:rPr>
-              <a:t>Aviso de «está escribiendo» y marca de «visto».</a:t>
-            </a:r>
-          </a:p>
-          <a:p>
-            <a:pPr>
-              <a:spcAft>
-                <a:spcPts val="1000"/>
-              </a:spcAft>
-            </a:pPr>
-            <a:r>
-              <a:rPr sz="1600">
-                <a:solidFill>
-                  <a:srgbClr val="3FC19F"/>
-                </a:solidFill>
-                <a:latin typeface="Segoe UI"/>
-              </a:rPr>
-              <a:t>▸  </a:t>
-            </a:r>
-            <a:r>
-              <a:rPr sz="1600">
-                <a:solidFill>
-                  <a:srgbClr val="F2F7F5"/>
-                </a:solidFill>
-                <a:latin typeface="Segoe UI"/>
-              </a:rPr>
-              <a:t>Contador de mensajes sin leer junto a cada persona.</a:t>
-            </a:r>
-          </a:p>
-          <a:p>
-            <a:pPr>
-              <a:spcAft>
-                <a:spcPts val="1000"/>
-              </a:spcAft>
-            </a:pPr>
-            <a:r>
-              <a:rPr sz="1600">
-                <a:solidFill>
-                  <a:srgbClr val="3FC19F"/>
-                </a:solidFill>
-                <a:latin typeface="Segoe UI"/>
-              </a:rPr>
-              <a:t>▸  </a:t>
-            </a:r>
-            <a:r>
-              <a:rPr sz="1600">
-                <a:solidFill>
-                  <a:srgbClr val="F2F7F5"/>
-                </a:solidFill>
-                <a:latin typeface="Segoe UI"/>
-              </a:rPr>
-              <a:t>El «visto» solo se marca cuando de verdad se abre la conversación.</a:t>
-            </a:r>
-          </a:p>
-          <a:p>
-            <a:pPr>
-              <a:spcAft>
-                <a:spcPts val="1000"/>
-              </a:spcAft>
-            </a:pPr>
-            <a:r>
-              <a:rPr sz="1600">
-                <a:solidFill>
-                  <a:srgbClr val="3FC19F"/>
-                </a:solidFill>
-                <a:latin typeface="Segoe UI"/>
-              </a:rPr>
-              <a:t>▸  </a:t>
-            </a:r>
-            <a:r>
-              <a:rPr sz="1600">
-                <a:solidFill>
-                  <a:srgbClr val="F2F7F5"/>
-                </a:solidFill>
-                <a:latin typeface="Segoe UI"/>
-              </a:rPr>
-              <a:t>Si estás leyendo, suena el aviso pero no salta la notificación.</a:t>
-            </a:r>
-          </a:p>
-          <a:p>
-            <a:pPr>
-              <a:spcAft>
-                <a:spcPts val="1000"/>
-              </a:spcAft>
-            </a:pPr>
-            <a:r>
-              <a:rPr sz="1600">
-                <a:solidFill>
-                  <a:srgbClr val="3FC19F"/>
-                </a:solidFill>
-                <a:latin typeface="Segoe UI"/>
-              </a:rPr>
-              <a:t>▸  </a:t>
-            </a:r>
-            <a:r>
-              <a:rPr sz="1600">
-                <a:solidFill>
-                  <a:srgbClr val="F2F7F5"/>
-                </a:solidFill>
-                <a:latin typeface="Segoe UI"/>
-              </a:rPr>
-              <a:t>Los avisos se pausan cuando la pestaña está en segundo plano.</a:t>
-            </a:r>
-          </a:p>
-        </p:txBody>
-      </p:sp>
-      <p:sp>
-        <p:nvSpPr>
-          <p:cNvPr id="9" name="Rounded Rectangle 8"/>
+          <p:cNvPr id="7" name="Rounded Rectangle 6"/>
           <p:cNvSpPr/>
           <p:nvPr/>
         </p:nvSpPr>
         <p:spPr>
           <a:xfrm>
-            <a:off x="6729984" y="2328843"/>
-            <a:ext cx="4828032" cy="2840393"/>
+            <a:off x="685800" y="1737360"/>
+            <a:ext cx="3520440" cy="2103120"/>
           </a:xfrm>
           <a:prstGeom prst="roundRect">
             <a:avLst>
-              <a:gd name="adj" fmla="val 3000"/>
+              <a:gd name="adj" fmla="val 8000"/>
             </a:avLst>
           </a:prstGeom>
-          <a:noFill/>
-          <a:ln w="12700">
+          <a:solidFill>
+            <a:srgbClr val="132A26"/>
+          </a:solidFill>
+          <a:ln w="15875">
             <a:solidFill>
-              <a:srgbClr val="1F6F5C"/>
+              <a:srgbClr val="3FC19F"/>
             </a:solidFill>
           </a:ln>
           <a:effectLst/>
@@ -10539,30 +10798,906 @@
           </a:p>
         </p:txBody>
       </p:sp>
-      <p:pic>
-        <p:nvPicPr>
-          <p:cNvPr id="8" name="Picture 7" descr="12-contenedor-chat.png"/>
-          <p:cNvPicPr>
-            <a:picLocks noChangeAspect="1"/>
-          </p:cNvPicPr>
-          <p:nvPr/>
-        </p:nvPicPr>
-        <p:blipFill>
-          <a:blip r:embed="rId2"/>
-          <a:stretch>
-            <a:fillRect/>
-          </a:stretch>
-        </p:blipFill>
-        <p:spPr>
-          <a:xfrm>
-            <a:off x="6766560" y="2365419"/>
-            <a:ext cx="4754880" cy="2767241"/>
-          </a:xfrm>
-          <a:prstGeom prst="rect">
-            <a:avLst/>
-          </a:prstGeom>
-        </p:spPr>
-      </p:pic>
+      <p:sp>
+        <p:nvSpPr>
+          <p:cNvPr id="8" name="TextBox 7"/>
+          <p:cNvSpPr txBox="1"/>
+          <p:nvPr/>
+        </p:nvSpPr>
+        <p:spPr>
+          <a:xfrm>
+            <a:off x="886968" y="1901952"/>
+            <a:ext cx="3118104" cy="457200"/>
+          </a:xfrm>
+          <a:prstGeom prst="rect">
+            <a:avLst/>
+          </a:prstGeom>
+          <a:noFill/>
+        </p:spPr>
+        <p:txBody>
+          <a:bodyPr wrap="square" anchor="t">
+            <a:spAutoFit/>
+          </a:bodyPr>
+          <a:lstStyle/>
+          <a:p>
+            <a:pPr algn="l">
+              <a:spcAft>
+                <a:spcPts val="600"/>
+              </a:spcAft>
+            </a:pPr>
+            <a:r>
+              <a:rPr sz="1300" b="1">
+                <a:solidFill>
+                  <a:srgbClr val="3FC19F"/>
+                </a:solidFill>
+                <a:latin typeface="Segoe UI"/>
+              </a:rPr>
+              <a:t>Diseño</a:t>
+            </a:r>
+          </a:p>
+        </p:txBody>
+      </p:sp>
+      <p:sp>
+        <p:nvSpPr>
+          <p:cNvPr id="9" name="TextBox 8"/>
+          <p:cNvSpPr txBox="1"/>
+          <p:nvPr/>
+        </p:nvSpPr>
+        <p:spPr>
+          <a:xfrm>
+            <a:off x="886968" y="2395728"/>
+            <a:ext cx="3118104" cy="1280160"/>
+          </a:xfrm>
+          <a:prstGeom prst="rect">
+            <a:avLst/>
+          </a:prstGeom>
+          <a:noFill/>
+        </p:spPr>
+        <p:txBody>
+          <a:bodyPr wrap="square" anchor="t">
+            <a:spAutoFit/>
+          </a:bodyPr>
+          <a:lstStyle/>
+          <a:p>
+            <a:pPr algn="l">
+              <a:spcAft>
+                <a:spcPts val="400"/>
+              </a:spcAft>
+            </a:pPr>
+            <a:r>
+              <a:rPr sz="1100" b="0">
+                <a:solidFill>
+                  <a:srgbClr val="F2F7F5"/>
+                </a:solidFill>
+                <a:latin typeface="Segoe UI"/>
+              </a:rPr>
+              <a:t>30 esquemas en 5 épocas.</a:t>
+            </a:r>
+          </a:p>
+          <a:p>
+            <a:pPr algn="l">
+              <a:spcAft>
+                <a:spcPts val="400"/>
+              </a:spcAft>
+            </a:pPr>
+            <a:r>
+              <a:rPr sz="1100" b="0">
+                <a:solidFill>
+                  <a:srgbClr val="F2F7F5"/>
+                </a:solidFill>
+                <a:latin typeface="Segoe UI"/>
+              </a:rPr>
+              <a:t>Carrusel de temas.</a:t>
+            </a:r>
+          </a:p>
+          <a:p>
+            <a:pPr algn="l">
+              <a:spcAft>
+                <a:spcPts val="400"/>
+              </a:spcAft>
+            </a:pPr>
+            <a:r>
+              <a:rPr sz="1100" b="0">
+                <a:solidFill>
+                  <a:srgbClr val="F2F7F5"/>
+                </a:solidFill>
+                <a:latin typeface="Segoe UI"/>
+              </a:rPr>
+              <a:t>Sin parpadeo al recargar.</a:t>
+            </a:r>
+          </a:p>
+        </p:txBody>
+      </p:sp>
+      <p:sp>
+        <p:nvSpPr>
+          <p:cNvPr id="10" name="Rounded Rectangle 9"/>
+          <p:cNvSpPr/>
+          <p:nvPr/>
+        </p:nvSpPr>
+        <p:spPr>
+          <a:xfrm>
+            <a:off x="4434840" y="1737360"/>
+            <a:ext cx="3520440" cy="2103120"/>
+          </a:xfrm>
+          <a:prstGeom prst="roundRect">
+            <a:avLst>
+              <a:gd name="adj" fmla="val 8000"/>
+            </a:avLst>
+          </a:prstGeom>
+          <a:solidFill>
+            <a:srgbClr val="132A26"/>
+          </a:solidFill>
+          <a:ln w="15875">
+            <a:solidFill>
+              <a:srgbClr val="4A9FE0"/>
+            </a:solidFill>
+          </a:ln>
+          <a:effectLst/>
+        </p:spPr>
+        <p:style>
+          <a:lnRef idx="1">
+            <a:schemeClr val="accent1"/>
+          </a:lnRef>
+          <a:fillRef idx="3">
+            <a:schemeClr val="accent1"/>
+          </a:fillRef>
+          <a:effectRef idx="2">
+            <a:schemeClr val="accent1"/>
+          </a:effectRef>
+          <a:fontRef idx="minor">
+            <a:schemeClr val="lt1"/>
+          </a:fontRef>
+        </p:style>
+        <p:txBody>
+          <a:bodyPr rtlCol="0" anchor="ctr"/>
+          <a:lstStyle/>
+          <a:p>
+            <a:pPr algn="ctr"/>
+          </a:p>
+        </p:txBody>
+      </p:sp>
+      <p:sp>
+        <p:nvSpPr>
+          <p:cNvPr id="11" name="TextBox 10"/>
+          <p:cNvSpPr txBox="1"/>
+          <p:nvPr/>
+        </p:nvSpPr>
+        <p:spPr>
+          <a:xfrm>
+            <a:off x="4636007" y="1901952"/>
+            <a:ext cx="3118104" cy="457200"/>
+          </a:xfrm>
+          <a:prstGeom prst="rect">
+            <a:avLst/>
+          </a:prstGeom>
+          <a:noFill/>
+        </p:spPr>
+        <p:txBody>
+          <a:bodyPr wrap="square" anchor="t">
+            <a:spAutoFit/>
+          </a:bodyPr>
+          <a:lstStyle/>
+          <a:p>
+            <a:pPr algn="l">
+              <a:spcAft>
+                <a:spcPts val="600"/>
+              </a:spcAft>
+            </a:pPr>
+            <a:r>
+              <a:rPr sz="1300" b="1">
+                <a:solidFill>
+                  <a:srgbClr val="4A9FE0"/>
+                </a:solidFill>
+                <a:latin typeface="Segoe UI"/>
+              </a:rPr>
+              <a:t>Foro</a:t>
+            </a:r>
+          </a:p>
+        </p:txBody>
+      </p:sp>
+      <p:sp>
+        <p:nvSpPr>
+          <p:cNvPr id="12" name="TextBox 11"/>
+          <p:cNvSpPr txBox="1"/>
+          <p:nvPr/>
+        </p:nvSpPr>
+        <p:spPr>
+          <a:xfrm>
+            <a:off x="4636007" y="2395728"/>
+            <a:ext cx="3118104" cy="1280160"/>
+          </a:xfrm>
+          <a:prstGeom prst="rect">
+            <a:avLst/>
+          </a:prstGeom>
+          <a:noFill/>
+        </p:spPr>
+        <p:txBody>
+          <a:bodyPr wrap="square" anchor="t">
+            <a:spAutoFit/>
+          </a:bodyPr>
+          <a:lstStyle/>
+          <a:p>
+            <a:pPr algn="l">
+              <a:spcAft>
+                <a:spcPts val="400"/>
+              </a:spcAft>
+            </a:pPr>
+            <a:r>
+              <a:rPr sz="1100" b="0">
+                <a:solidFill>
+                  <a:srgbClr val="F2F7F5"/>
+                </a:solidFill>
+                <a:latin typeface="Segoe UI"/>
+              </a:rPr>
+              <a:t>Avatares en publicaciones.</a:t>
+            </a:r>
+          </a:p>
+          <a:p>
+            <a:pPr algn="l">
+              <a:spcAft>
+                <a:spcPts val="400"/>
+              </a:spcAft>
+            </a:pPr>
+            <a:r>
+              <a:rPr sz="1100" b="0">
+                <a:solidFill>
+                  <a:srgbClr val="F2F7F5"/>
+                </a:solidFill>
+                <a:latin typeface="Segoe UI"/>
+              </a:rPr>
+              <a:t>Descarga con nombre original.</a:t>
+            </a:r>
+          </a:p>
+          <a:p>
+            <a:pPr algn="l">
+              <a:spcAft>
+                <a:spcPts val="400"/>
+              </a:spcAft>
+            </a:pPr>
+            <a:r>
+              <a:rPr sz="1100" b="0">
+                <a:solidFill>
+                  <a:srgbClr val="F2F7F5"/>
+                </a:solidFill>
+                <a:latin typeface="Segoe UI"/>
+              </a:rPr>
+              <a:t>Cancelar subidas · borrar adjuntos.</a:t>
+            </a:r>
+          </a:p>
+        </p:txBody>
+      </p:sp>
+      <p:sp>
+        <p:nvSpPr>
+          <p:cNvPr id="13" name="Rounded Rectangle 12"/>
+          <p:cNvSpPr/>
+          <p:nvPr/>
+        </p:nvSpPr>
+        <p:spPr>
+          <a:xfrm>
+            <a:off x="8183879" y="1737360"/>
+            <a:ext cx="3383280" cy="2103120"/>
+          </a:xfrm>
+          <a:prstGeom prst="roundRect">
+            <a:avLst>
+              <a:gd name="adj" fmla="val 8000"/>
+            </a:avLst>
+          </a:prstGeom>
+          <a:solidFill>
+            <a:srgbClr val="132A26"/>
+          </a:solidFill>
+          <a:ln w="15875">
+            <a:solidFill>
+              <a:srgbClr val="3FC19F"/>
+            </a:solidFill>
+          </a:ln>
+          <a:effectLst/>
+        </p:spPr>
+        <p:style>
+          <a:lnRef idx="1">
+            <a:schemeClr val="accent1"/>
+          </a:lnRef>
+          <a:fillRef idx="3">
+            <a:schemeClr val="accent1"/>
+          </a:fillRef>
+          <a:effectRef idx="2">
+            <a:schemeClr val="accent1"/>
+          </a:effectRef>
+          <a:fontRef idx="minor">
+            <a:schemeClr val="lt1"/>
+          </a:fontRef>
+        </p:style>
+        <p:txBody>
+          <a:bodyPr rtlCol="0" anchor="ctr"/>
+          <a:lstStyle/>
+          <a:p>
+            <a:pPr algn="ctr"/>
+          </a:p>
+        </p:txBody>
+      </p:sp>
+      <p:sp>
+        <p:nvSpPr>
+          <p:cNvPr id="14" name="TextBox 13"/>
+          <p:cNvSpPr txBox="1"/>
+          <p:nvPr/>
+        </p:nvSpPr>
+        <p:spPr>
+          <a:xfrm>
+            <a:off x="8385048" y="1901952"/>
+            <a:ext cx="2980944" cy="457200"/>
+          </a:xfrm>
+          <a:prstGeom prst="rect">
+            <a:avLst/>
+          </a:prstGeom>
+          <a:noFill/>
+        </p:spPr>
+        <p:txBody>
+          <a:bodyPr wrap="square" anchor="t">
+            <a:spAutoFit/>
+          </a:bodyPr>
+          <a:lstStyle/>
+          <a:p>
+            <a:pPr algn="l">
+              <a:spcAft>
+                <a:spcPts val="600"/>
+              </a:spcAft>
+            </a:pPr>
+            <a:r>
+              <a:rPr sz="1300" b="1">
+                <a:solidFill>
+                  <a:srgbClr val="3FC19F"/>
+                </a:solidFill>
+                <a:latin typeface="Segoe UI"/>
+              </a:rPr>
+              <a:t>Chat</a:t>
+            </a:r>
+          </a:p>
+        </p:txBody>
+      </p:sp>
+      <p:sp>
+        <p:nvSpPr>
+          <p:cNvPr id="15" name="TextBox 14"/>
+          <p:cNvSpPr txBox="1"/>
+          <p:nvPr/>
+        </p:nvSpPr>
+        <p:spPr>
+          <a:xfrm>
+            <a:off x="8385048" y="2395728"/>
+            <a:ext cx="2980944" cy="1280160"/>
+          </a:xfrm>
+          <a:prstGeom prst="rect">
+            <a:avLst/>
+          </a:prstGeom>
+          <a:noFill/>
+        </p:spPr>
+        <p:txBody>
+          <a:bodyPr wrap="square" anchor="t">
+            <a:spAutoFit/>
+          </a:bodyPr>
+          <a:lstStyle/>
+          <a:p>
+            <a:pPr algn="l">
+              <a:spcAft>
+                <a:spcPts val="400"/>
+              </a:spcAft>
+            </a:pPr>
+            <a:r>
+              <a:rPr sz="1100" b="0">
+                <a:solidFill>
+                  <a:srgbClr val="F2F7F5"/>
+                </a:solidFill>
+                <a:latin typeface="Segoe UI"/>
+              </a:rPr>
+              <a:t>«Está escribiendo» y «visto».</a:t>
+            </a:r>
+          </a:p>
+          <a:p>
+            <a:pPr algn="l">
+              <a:spcAft>
+                <a:spcPts val="400"/>
+              </a:spcAft>
+            </a:pPr>
+            <a:r>
+              <a:rPr sz="1100" b="0">
+                <a:solidFill>
+                  <a:srgbClr val="F2F7F5"/>
+                </a:solidFill>
+                <a:latin typeface="Segoe UI"/>
+              </a:rPr>
+              <a:t>Contador de no leídos.</a:t>
+            </a:r>
+          </a:p>
+          <a:p>
+            <a:pPr algn="l">
+              <a:spcAft>
+                <a:spcPts val="400"/>
+              </a:spcAft>
+            </a:pPr>
+            <a:r>
+              <a:rPr sz="1100" b="0">
+                <a:solidFill>
+                  <a:srgbClr val="F2F7F5"/>
+                </a:solidFill>
+                <a:latin typeface="Segoe UI"/>
+              </a:rPr>
+              <a:t>Sonido corregido · abre en Usuarios.</a:t>
+            </a:r>
+          </a:p>
+        </p:txBody>
+      </p:sp>
+      <p:sp>
+        <p:nvSpPr>
+          <p:cNvPr id="16" name="Rounded Rectangle 15"/>
+          <p:cNvSpPr/>
+          <p:nvPr/>
+        </p:nvSpPr>
+        <p:spPr>
+          <a:xfrm>
+            <a:off x="685800" y="4069080"/>
+            <a:ext cx="3520440" cy="2011680"/>
+          </a:xfrm>
+          <a:prstGeom prst="roundRect">
+            <a:avLst>
+              <a:gd name="adj" fmla="val 8000"/>
+            </a:avLst>
+          </a:prstGeom>
+          <a:solidFill>
+            <a:srgbClr val="132A26"/>
+          </a:solidFill>
+          <a:ln w="15875">
+            <a:solidFill>
+              <a:srgbClr val="E8A33D"/>
+            </a:solidFill>
+          </a:ln>
+          <a:effectLst/>
+        </p:spPr>
+        <p:style>
+          <a:lnRef idx="1">
+            <a:schemeClr val="accent1"/>
+          </a:lnRef>
+          <a:fillRef idx="3">
+            <a:schemeClr val="accent1"/>
+          </a:fillRef>
+          <a:effectRef idx="2">
+            <a:schemeClr val="accent1"/>
+          </a:effectRef>
+          <a:fontRef idx="minor">
+            <a:schemeClr val="lt1"/>
+          </a:fontRef>
+        </p:style>
+        <p:txBody>
+          <a:bodyPr rtlCol="0" anchor="ctr"/>
+          <a:lstStyle/>
+          <a:p>
+            <a:pPr algn="ctr"/>
+          </a:p>
+        </p:txBody>
+      </p:sp>
+      <p:sp>
+        <p:nvSpPr>
+          <p:cNvPr id="17" name="TextBox 16"/>
+          <p:cNvSpPr txBox="1"/>
+          <p:nvPr/>
+        </p:nvSpPr>
+        <p:spPr>
+          <a:xfrm>
+            <a:off x="886968" y="4233672"/>
+            <a:ext cx="3118104" cy="457200"/>
+          </a:xfrm>
+          <a:prstGeom prst="rect">
+            <a:avLst/>
+          </a:prstGeom>
+          <a:noFill/>
+        </p:spPr>
+        <p:txBody>
+          <a:bodyPr wrap="square" anchor="t">
+            <a:spAutoFit/>
+          </a:bodyPr>
+          <a:lstStyle/>
+          <a:p>
+            <a:pPr algn="l">
+              <a:spcAft>
+                <a:spcPts val="600"/>
+              </a:spcAft>
+            </a:pPr>
+            <a:r>
+              <a:rPr sz="1300" b="1">
+                <a:solidFill>
+                  <a:srgbClr val="E8A33D"/>
+                </a:solidFill>
+                <a:latin typeface="Segoe UI"/>
+              </a:rPr>
+              <a:t>Escritorio e IA</a:t>
+            </a:r>
+          </a:p>
+        </p:txBody>
+      </p:sp>
+      <p:sp>
+        <p:nvSpPr>
+          <p:cNvPr id="18" name="TextBox 17"/>
+          <p:cNvSpPr txBox="1"/>
+          <p:nvPr/>
+        </p:nvSpPr>
+        <p:spPr>
+          <a:xfrm>
+            <a:off x="886968" y="4727448"/>
+            <a:ext cx="3118104" cy="1188720"/>
+          </a:xfrm>
+          <a:prstGeom prst="rect">
+            <a:avLst/>
+          </a:prstGeom>
+          <a:noFill/>
+        </p:spPr>
+        <p:txBody>
+          <a:bodyPr wrap="square" anchor="t">
+            <a:spAutoFit/>
+          </a:bodyPr>
+          <a:lstStyle/>
+          <a:p>
+            <a:pPr algn="l">
+              <a:spcAft>
+                <a:spcPts val="400"/>
+              </a:spcAft>
+            </a:pPr>
+            <a:r>
+              <a:rPr sz="1100" b="0">
+                <a:solidFill>
+                  <a:srgbClr val="F2F7F5"/>
+                </a:solidFill>
+                <a:latin typeface="Segoe UI"/>
+              </a:rPr>
+              <a:t>Ventana nueva y recarga.</a:t>
+            </a:r>
+          </a:p>
+          <a:p>
+            <a:pPr algn="l">
+              <a:spcAft>
+                <a:spcPts val="400"/>
+              </a:spcAft>
+            </a:pPr>
+            <a:r>
+              <a:rPr sz="1100" b="0">
+                <a:solidFill>
+                  <a:srgbClr val="F2F7F5"/>
+                </a:solidFill>
+                <a:latin typeface="Segoe UI"/>
+              </a:rPr>
+              <a:t>Pase firmado que caduca.</a:t>
+            </a:r>
+          </a:p>
+          <a:p>
+            <a:pPr algn="l">
+              <a:spcAft>
+                <a:spcPts val="400"/>
+              </a:spcAft>
+            </a:pPr>
+            <a:r>
+              <a:rPr sz="1100" b="0">
+                <a:solidFill>
+                  <a:srgbClr val="F2F7F5"/>
+                </a:solidFill>
+                <a:latin typeface="Segoe UI"/>
+              </a:rPr>
+              <a:t>TutorUTT local (solo admin).</a:t>
+            </a:r>
+          </a:p>
+        </p:txBody>
+      </p:sp>
+      <p:sp>
+        <p:nvSpPr>
+          <p:cNvPr id="19" name="Rounded Rectangle 18"/>
+          <p:cNvSpPr/>
+          <p:nvPr/>
+        </p:nvSpPr>
+        <p:spPr>
+          <a:xfrm>
+            <a:off x="4434840" y="4069080"/>
+            <a:ext cx="3520440" cy="2011680"/>
+          </a:xfrm>
+          <a:prstGeom prst="roundRect">
+            <a:avLst>
+              <a:gd name="adj" fmla="val 8000"/>
+            </a:avLst>
+          </a:prstGeom>
+          <a:solidFill>
+            <a:srgbClr val="132A26"/>
+          </a:solidFill>
+          <a:ln w="15875">
+            <a:solidFill>
+              <a:srgbClr val="4A9FE0"/>
+            </a:solidFill>
+          </a:ln>
+          <a:effectLst/>
+        </p:spPr>
+        <p:style>
+          <a:lnRef idx="1">
+            <a:schemeClr val="accent1"/>
+          </a:lnRef>
+          <a:fillRef idx="3">
+            <a:schemeClr val="accent1"/>
+          </a:fillRef>
+          <a:effectRef idx="2">
+            <a:schemeClr val="accent1"/>
+          </a:effectRef>
+          <a:fontRef idx="minor">
+            <a:schemeClr val="lt1"/>
+          </a:fontRef>
+        </p:style>
+        <p:txBody>
+          <a:bodyPr rtlCol="0" anchor="ctr"/>
+          <a:lstStyle/>
+          <a:p>
+            <a:pPr algn="ctr"/>
+          </a:p>
+        </p:txBody>
+      </p:sp>
+      <p:sp>
+        <p:nvSpPr>
+          <p:cNvPr id="20" name="TextBox 19"/>
+          <p:cNvSpPr txBox="1"/>
+          <p:nvPr/>
+        </p:nvSpPr>
+        <p:spPr>
+          <a:xfrm>
+            <a:off x="4636007" y="4233672"/>
+            <a:ext cx="3118104" cy="457200"/>
+          </a:xfrm>
+          <a:prstGeom prst="rect">
+            <a:avLst/>
+          </a:prstGeom>
+          <a:noFill/>
+        </p:spPr>
+        <p:txBody>
+          <a:bodyPr wrap="square" anchor="t">
+            <a:spAutoFit/>
+          </a:bodyPr>
+          <a:lstStyle/>
+          <a:p>
+            <a:pPr algn="l">
+              <a:spcAft>
+                <a:spcPts val="600"/>
+              </a:spcAft>
+            </a:pPr>
+            <a:r>
+              <a:rPr sz="1300" b="1">
+                <a:solidFill>
+                  <a:srgbClr val="4A9FE0"/>
+                </a:solidFill>
+                <a:latin typeface="Segoe UI"/>
+              </a:rPr>
+              <a:t>Rendimiento</a:t>
+            </a:r>
+          </a:p>
+        </p:txBody>
+      </p:sp>
+      <p:sp>
+        <p:nvSpPr>
+          <p:cNvPr id="21" name="TextBox 20"/>
+          <p:cNvSpPr txBox="1"/>
+          <p:nvPr/>
+        </p:nvSpPr>
+        <p:spPr>
+          <a:xfrm>
+            <a:off x="4636007" y="4727448"/>
+            <a:ext cx="3118104" cy="1188720"/>
+          </a:xfrm>
+          <a:prstGeom prst="rect">
+            <a:avLst/>
+          </a:prstGeom>
+          <a:noFill/>
+        </p:spPr>
+        <p:txBody>
+          <a:bodyPr wrap="square" anchor="t">
+            <a:spAutoFit/>
+          </a:bodyPr>
+          <a:lstStyle/>
+          <a:p>
+            <a:pPr algn="l">
+              <a:spcAft>
+                <a:spcPts val="400"/>
+              </a:spcAft>
+            </a:pPr>
+            <a:r>
+              <a:rPr sz="1100" b="0">
+                <a:solidFill>
+                  <a:srgbClr val="F2F7F5"/>
+                </a:solidFill>
+                <a:latin typeface="Segoe UI"/>
+              </a:rPr>
+              <a:t>Modo ligero automático.</a:t>
+            </a:r>
+          </a:p>
+          <a:p>
+            <a:pPr algn="l">
+              <a:spcAft>
+                <a:spcPts val="400"/>
+              </a:spcAft>
+            </a:pPr>
+            <a:r>
+              <a:rPr sz="1100" b="0">
+                <a:solidFill>
+                  <a:srgbClr val="F2F7F5"/>
+                </a:solidFill>
+                <a:latin typeface="Segoe UI"/>
+              </a:rPr>
+              <a:t>Fondos a 1080p reales.</a:t>
+            </a:r>
+          </a:p>
+          <a:p>
+            <a:pPr algn="l">
+              <a:spcAft>
+                <a:spcPts val="400"/>
+              </a:spcAft>
+            </a:pPr>
+            <a:r>
+              <a:rPr sz="1100" b="0">
+                <a:solidFill>
+                  <a:srgbClr val="F2F7F5"/>
+                </a:solidFill>
+                <a:latin typeface="Segoe UI"/>
+              </a:rPr>
+              <a:t>Sondeos en pausa.</a:t>
+            </a:r>
+          </a:p>
+        </p:txBody>
+      </p:sp>
+      <p:sp>
+        <p:nvSpPr>
+          <p:cNvPr id="22" name="Rounded Rectangle 21"/>
+          <p:cNvSpPr/>
+          <p:nvPr/>
+        </p:nvSpPr>
+        <p:spPr>
+          <a:xfrm>
+            <a:off x="8183879" y="4069080"/>
+            <a:ext cx="3383280" cy="2011680"/>
+          </a:xfrm>
+          <a:prstGeom prst="roundRect">
+            <a:avLst>
+              <a:gd name="adj" fmla="val 8000"/>
+            </a:avLst>
+          </a:prstGeom>
+          <a:solidFill>
+            <a:srgbClr val="132A26"/>
+          </a:solidFill>
+          <a:ln w="15875">
+            <a:solidFill>
+              <a:srgbClr val="E06C5E"/>
+            </a:solidFill>
+          </a:ln>
+          <a:effectLst/>
+        </p:spPr>
+        <p:style>
+          <a:lnRef idx="1">
+            <a:schemeClr val="accent1"/>
+          </a:lnRef>
+          <a:fillRef idx="3">
+            <a:schemeClr val="accent1"/>
+          </a:fillRef>
+          <a:effectRef idx="2">
+            <a:schemeClr val="accent1"/>
+          </a:effectRef>
+          <a:fontRef idx="minor">
+            <a:schemeClr val="lt1"/>
+          </a:fontRef>
+        </p:style>
+        <p:txBody>
+          <a:bodyPr rtlCol="0" anchor="ctr"/>
+          <a:lstStyle/>
+          <a:p>
+            <a:pPr algn="ctr"/>
+          </a:p>
+        </p:txBody>
+      </p:sp>
+      <p:sp>
+        <p:nvSpPr>
+          <p:cNvPr id="23" name="TextBox 22"/>
+          <p:cNvSpPr txBox="1"/>
+          <p:nvPr/>
+        </p:nvSpPr>
+        <p:spPr>
+          <a:xfrm>
+            <a:off x="8385048" y="4233672"/>
+            <a:ext cx="2980944" cy="457200"/>
+          </a:xfrm>
+          <a:prstGeom prst="rect">
+            <a:avLst/>
+          </a:prstGeom>
+          <a:noFill/>
+        </p:spPr>
+        <p:txBody>
+          <a:bodyPr wrap="square" anchor="t">
+            <a:spAutoFit/>
+          </a:bodyPr>
+          <a:lstStyle/>
+          <a:p>
+            <a:pPr algn="l">
+              <a:spcAft>
+                <a:spcPts val="600"/>
+              </a:spcAft>
+            </a:pPr>
+            <a:r>
+              <a:rPr sz="1300" b="1">
+                <a:solidFill>
+                  <a:srgbClr val="E06C5E"/>
+                </a:solidFill>
+                <a:latin typeface="Segoe UI"/>
+              </a:rPr>
+              <a:t>Seguridad</a:t>
+            </a:r>
+          </a:p>
+        </p:txBody>
+      </p:sp>
+      <p:sp>
+        <p:nvSpPr>
+          <p:cNvPr id="24" name="TextBox 23"/>
+          <p:cNvSpPr txBox="1"/>
+          <p:nvPr/>
+        </p:nvSpPr>
+        <p:spPr>
+          <a:xfrm>
+            <a:off x="8385048" y="4727448"/>
+            <a:ext cx="2980944" cy="1188720"/>
+          </a:xfrm>
+          <a:prstGeom prst="rect">
+            <a:avLst/>
+          </a:prstGeom>
+          <a:noFill/>
+        </p:spPr>
+        <p:txBody>
+          <a:bodyPr wrap="square" anchor="t">
+            <a:spAutoFit/>
+          </a:bodyPr>
+          <a:lstStyle/>
+          <a:p>
+            <a:pPr algn="l">
+              <a:spcAft>
+                <a:spcPts val="400"/>
+              </a:spcAft>
+            </a:pPr>
+            <a:r>
+              <a:rPr sz="1100" b="0">
+                <a:solidFill>
+                  <a:srgbClr val="F2F7F5"/>
+                </a:solidFill>
+                <a:latin typeface="Segoe UI"/>
+              </a:rPr>
+              <a:t>2FA con Authenticator.</a:t>
+            </a:r>
+          </a:p>
+          <a:p>
+            <a:pPr algn="l">
+              <a:spcAft>
+                <a:spcPts val="400"/>
+              </a:spcAft>
+            </a:pPr>
+            <a:r>
+              <a:rPr sz="1100" b="0">
+                <a:solidFill>
+                  <a:srgbClr val="F2F7F5"/>
+                </a:solidFill>
+                <a:latin typeface="Segoe UI"/>
+              </a:rPr>
+              <a:t>Límites por usuario.</a:t>
+            </a:r>
+          </a:p>
+          <a:p>
+            <a:pPr algn="l">
+              <a:spcAft>
+                <a:spcPts val="400"/>
+              </a:spcAft>
+            </a:pPr>
+            <a:r>
+              <a:rPr sz="1100" b="0">
+                <a:solidFill>
+                  <a:srgbClr val="F2F7F5"/>
+                </a:solidFill>
+                <a:latin typeface="Segoe UI"/>
+              </a:rPr>
+              <a:t>Monitor del sistema: solo admin.</a:t>
+            </a:r>
+          </a:p>
+        </p:txBody>
+      </p:sp>
     </p:spTree>
   </p:cSld>
   <p:clrMapOvr>
@@ -10702,7 +11837,7 @@
                 </a:solidFill>
                 <a:latin typeface="Segoe UI Semibold"/>
               </a:rPr>
-              <a:t>Hecho para equipos modestos</a:t>
+              <a:t>El asistente TutorUTT</a:t>
             </a:r>
           </a:p>
         </p:txBody>
@@ -10741,7 +11876,7 @@
                 </a:solidFill>
                 <a:latin typeface="Segoe UI"/>
               </a:rPr>
-              <a:t>Cada decisión pensada en un Core 2 Duo</a:t>
+              <a:t>IA local, sin mandar nada a internet</a:t>
             </a:r>
           </a:p>
         </p:txBody>
@@ -10787,26 +11922,172 @@
       </p:sp>
       <p:sp>
         <p:nvSpPr>
-          <p:cNvPr id="7" name="Rounded Rectangle 6"/>
+          <p:cNvPr id="7" name="TextBox 6"/>
+          <p:cNvSpPr txBox="1"/>
+          <p:nvPr/>
+        </p:nvSpPr>
+        <p:spPr>
+          <a:xfrm>
+            <a:off x="960120" y="1691640"/>
+            <a:ext cx="10332720" cy="3291840"/>
+          </a:xfrm>
+          <a:prstGeom prst="rect">
+            <a:avLst/>
+          </a:prstGeom>
+          <a:noFill/>
+        </p:spPr>
+        <p:txBody>
+          <a:bodyPr wrap="square">
+            <a:spAutoFit/>
+          </a:bodyPr>
+          <a:lstStyle/>
+          <a:p>
+            <a:pPr>
+              <a:spcAft>
+                <a:spcPts val="1000"/>
+              </a:spcAft>
+            </a:pPr>
+            <a:r>
+              <a:rPr sz="1700">
+                <a:solidFill>
+                  <a:srgbClr val="3FC19F"/>
+                </a:solidFill>
+                <a:latin typeface="Segoe UI"/>
+              </a:rPr>
+              <a:t>▸  </a:t>
+            </a:r>
+            <a:r>
+              <a:rPr sz="1700">
+                <a:solidFill>
+                  <a:srgbClr val="F2F7F5"/>
+                </a:solidFill>
+                <a:latin typeface="Segoe UI"/>
+              </a:rPr>
+              <a:t>El modelo corre en el equipo del administrador, con Ollama.</a:t>
+            </a:r>
+          </a:p>
+          <a:p>
+            <a:pPr>
+              <a:spcAft>
+                <a:spcPts val="1000"/>
+              </a:spcAft>
+            </a:pPr>
+            <a:r>
+              <a:rPr sz="1700">
+                <a:solidFill>
+                  <a:srgbClr val="3FC19F"/>
+                </a:solidFill>
+                <a:latin typeface="Segoe UI"/>
+              </a:rPr>
+              <a:t>▸  </a:t>
+            </a:r>
+            <a:r>
+              <a:rPr sz="1700">
+                <a:solidFill>
+                  <a:srgbClr val="F2F7F5"/>
+                </a:solidFill>
+                <a:latin typeface="Segoe UI"/>
+              </a:rPr>
+              <a:t>Ayuda con las materias de la carrera: explica, ejemplifica y propone ejercicios.</a:t>
+            </a:r>
+          </a:p>
+          <a:p>
+            <a:pPr>
+              <a:spcAft>
+                <a:spcPts val="1000"/>
+              </a:spcAft>
+            </a:pPr>
+            <a:r>
+              <a:rPr sz="1700">
+                <a:solidFill>
+                  <a:srgbClr val="3FC19F"/>
+                </a:solidFill>
+                <a:latin typeface="Segoe UI"/>
+              </a:rPr>
+              <a:t>▸  </a:t>
+            </a:r>
+            <a:r>
+              <a:rPr sz="1700">
+                <a:solidFill>
+                  <a:srgbClr val="F2F7F5"/>
+                </a:solidFill>
+                <a:latin typeface="Segoe UI"/>
+              </a:rPr>
+              <a:t>Las preguntas no salen de la universidad.</a:t>
+            </a:r>
+          </a:p>
+          <a:p>
+            <a:pPr>
+              <a:spcAft>
+                <a:spcPts val="1000"/>
+              </a:spcAft>
+            </a:pPr>
+            <a:r>
+              <a:rPr sz="1700">
+                <a:solidFill>
+                  <a:srgbClr val="3FC19F"/>
+                </a:solidFill>
+                <a:latin typeface="Segoe UI"/>
+              </a:rPr>
+              <a:t>▸  </a:t>
+            </a:r>
+            <a:r>
+              <a:rPr sz="1700">
+                <a:solidFill>
+                  <a:srgbClr val="F2F7F5"/>
+                </a:solidFill>
+                <a:latin typeface="Segoe UI"/>
+              </a:rPr>
+              <a:t>El panel muestra el uso de la tarjeta gráfica en vivo.</a:t>
+            </a:r>
+          </a:p>
+          <a:p>
+            <a:pPr>
+              <a:spcAft>
+                <a:spcPts val="1000"/>
+              </a:spcAft>
+            </a:pPr>
+            <a:r>
+              <a:rPr sz="1700">
+                <a:solidFill>
+                  <a:srgbClr val="3FC19F"/>
+                </a:solidFill>
+                <a:latin typeface="Segoe UI"/>
+              </a:rPr>
+              <a:t>▸  </a:t>
+            </a:r>
+            <a:r>
+              <a:rPr sz="1700">
+                <a:solidFill>
+                  <a:srgbClr val="F2F7F5"/>
+                </a:solidFill>
+                <a:latin typeface="Segoe UI"/>
+              </a:rPr>
+              <a:t>Hoy está habilitado solo para el administrador.</a:t>
+            </a:r>
+          </a:p>
+        </p:txBody>
+      </p:sp>
+      <p:sp>
+        <p:nvSpPr>
+          <p:cNvPr id="9" name="Rounded Rectangle 8"/>
           <p:cNvSpPr/>
           <p:nvPr/>
         </p:nvSpPr>
         <p:spPr>
           <a:xfrm>
-            <a:off x="822960" y="1783080"/>
-            <a:ext cx="3429000" cy="2286000"/>
+            <a:off x="8702867" y="1655064"/>
+            <a:ext cx="2528185" cy="4096512"/>
           </a:xfrm>
           <a:prstGeom prst="roundRect">
             <a:avLst>
-              <a:gd name="adj" fmla="val 8000"/>
+              <a:gd name="adj" fmla="val 3000"/>
             </a:avLst>
           </a:prstGeom>
-          <a:solidFill>
-            <a:srgbClr val="132A26"/>
-          </a:solidFill>
-          <a:ln w="15875">
+          <a:noFill/>
+          <a:ln w="12700">
             <a:solidFill>
-              <a:srgbClr val="3FC19F"/>
+              <a:srgbClr val="1F6F5C"/>
             </a:solidFill>
           </a:ln>
           <a:effectLst/>
@@ -10833,425 +12114,30 @@
           </a:p>
         </p:txBody>
       </p:sp>
-      <p:sp>
-        <p:nvSpPr>
-          <p:cNvPr id="8" name="TextBox 7"/>
-          <p:cNvSpPr txBox="1"/>
-          <p:nvPr/>
-        </p:nvSpPr>
-        <p:spPr>
-          <a:xfrm>
-            <a:off x="1024128" y="1947672"/>
-            <a:ext cx="3026664" cy="457200"/>
-          </a:xfrm>
-          <a:prstGeom prst="rect">
-            <a:avLst/>
-          </a:prstGeom>
-          <a:noFill/>
-        </p:spPr>
-        <p:txBody>
-          <a:bodyPr wrap="square" anchor="t">
-            <a:spAutoFit/>
-          </a:bodyPr>
-          <a:lstStyle/>
-          <a:p>
-            <a:pPr algn="l">
-              <a:spcAft>
-                <a:spcPts val="600"/>
-              </a:spcAft>
-            </a:pPr>
-            <a:r>
-              <a:rPr sz="1600" b="1">
-                <a:solidFill>
-                  <a:srgbClr val="3FC19F"/>
-                </a:solidFill>
-                <a:latin typeface="Segoe UI"/>
-              </a:rPr>
-              <a:t>Detección automática</a:t>
-            </a:r>
-          </a:p>
-        </p:txBody>
-      </p:sp>
-      <p:sp>
-        <p:nvSpPr>
-          <p:cNvPr id="9" name="TextBox 8"/>
-          <p:cNvSpPr txBox="1"/>
-          <p:nvPr/>
-        </p:nvSpPr>
-        <p:spPr>
-          <a:xfrm>
-            <a:off x="1024128" y="2441448"/>
-            <a:ext cx="3026664" cy="1463040"/>
-          </a:xfrm>
-          <a:prstGeom prst="rect">
-            <a:avLst/>
-          </a:prstGeom>
-          <a:noFill/>
-        </p:spPr>
-        <p:txBody>
-          <a:bodyPr wrap="square" anchor="t">
-            <a:spAutoFit/>
-          </a:bodyPr>
-          <a:lstStyle/>
-          <a:p>
-            <a:pPr algn="l">
-              <a:spcAft>
-                <a:spcPts val="400"/>
-              </a:spcAft>
-            </a:pPr>
-            <a:r>
-              <a:rPr sz="1300" b="0">
-                <a:solidFill>
-                  <a:srgbClr val="F2F7F5"/>
-                </a:solidFill>
-                <a:latin typeface="Segoe UI"/>
-              </a:rPr>
-              <a:t>Si el equipo tiene pocos núcleos o poca memoria, se activa el modo ligero.</a:t>
-            </a:r>
-          </a:p>
-        </p:txBody>
-      </p:sp>
-      <p:sp>
-        <p:nvSpPr>
-          <p:cNvPr id="10" name="Rounded Rectangle 9"/>
-          <p:cNvSpPr/>
-          <p:nvPr/>
-        </p:nvSpPr>
-        <p:spPr>
-          <a:xfrm>
-            <a:off x="4389120" y="1783080"/>
-            <a:ext cx="3429000" cy="2286000"/>
-          </a:xfrm>
-          <a:prstGeom prst="roundRect">
-            <a:avLst>
-              <a:gd name="adj" fmla="val 8000"/>
-            </a:avLst>
-          </a:prstGeom>
-          <a:solidFill>
-            <a:srgbClr val="132A26"/>
-          </a:solidFill>
-          <a:ln w="15875">
-            <a:solidFill>
-              <a:srgbClr val="3FC19F"/>
-            </a:solidFill>
-          </a:ln>
-          <a:effectLst/>
-        </p:spPr>
-        <p:style>
-          <a:lnRef idx="1">
-            <a:schemeClr val="accent1"/>
-          </a:lnRef>
-          <a:fillRef idx="3">
-            <a:schemeClr val="accent1"/>
-          </a:fillRef>
-          <a:effectRef idx="2">
-            <a:schemeClr val="accent1"/>
-          </a:effectRef>
-          <a:fontRef idx="minor">
-            <a:schemeClr val="lt1"/>
-          </a:fontRef>
-        </p:style>
-        <p:txBody>
-          <a:bodyPr rtlCol="0" anchor="ctr"/>
-          <a:lstStyle/>
-          <a:p>
-            <a:pPr algn="ctr"/>
-          </a:p>
-        </p:txBody>
-      </p:sp>
-      <p:sp>
-        <p:nvSpPr>
-          <p:cNvPr id="11" name="TextBox 10"/>
-          <p:cNvSpPr txBox="1"/>
-          <p:nvPr/>
-        </p:nvSpPr>
-        <p:spPr>
-          <a:xfrm>
-            <a:off x="4590288" y="1947672"/>
-            <a:ext cx="3026664" cy="457200"/>
-          </a:xfrm>
-          <a:prstGeom prst="rect">
-            <a:avLst/>
-          </a:prstGeom>
-          <a:noFill/>
-        </p:spPr>
-        <p:txBody>
-          <a:bodyPr wrap="square" anchor="t">
-            <a:spAutoFit/>
-          </a:bodyPr>
-          <a:lstStyle/>
-          <a:p>
-            <a:pPr algn="l">
-              <a:spcAft>
-                <a:spcPts val="600"/>
-              </a:spcAft>
-            </a:pPr>
-            <a:r>
-              <a:rPr sz="1600" b="1">
-                <a:solidFill>
-                  <a:srgbClr val="3FC19F"/>
-                </a:solidFill>
-                <a:latin typeface="Segoe UI"/>
-              </a:rPr>
-              <a:t>Menos efectos</a:t>
-            </a:r>
-          </a:p>
-        </p:txBody>
-      </p:sp>
-      <p:sp>
-        <p:nvSpPr>
-          <p:cNvPr id="12" name="TextBox 11"/>
-          <p:cNvSpPr txBox="1"/>
-          <p:nvPr/>
-        </p:nvSpPr>
-        <p:spPr>
-          <a:xfrm>
-            <a:off x="4590288" y="2441448"/>
-            <a:ext cx="3026664" cy="1463040"/>
-          </a:xfrm>
-          <a:prstGeom prst="rect">
-            <a:avLst/>
-          </a:prstGeom>
-          <a:noFill/>
-        </p:spPr>
-        <p:txBody>
-          <a:bodyPr wrap="square" anchor="t">
-            <a:spAutoFit/>
-          </a:bodyPr>
-          <a:lstStyle/>
-          <a:p>
-            <a:pPr algn="l">
-              <a:spcAft>
-                <a:spcPts val="400"/>
-              </a:spcAft>
-            </a:pPr>
-            <a:r>
-              <a:rPr sz="1300" b="0">
-                <a:solidFill>
-                  <a:srgbClr val="F2F7F5"/>
-                </a:solidFill>
-                <a:latin typeface="Segoe UI"/>
-              </a:rPr>
-              <a:t>Se apagan desenfoques y fondos fijos: es lo que más cuesta dibujar.</a:t>
-            </a:r>
-          </a:p>
-        </p:txBody>
-      </p:sp>
-      <p:sp>
-        <p:nvSpPr>
-          <p:cNvPr id="13" name="Rounded Rectangle 12"/>
-          <p:cNvSpPr/>
-          <p:nvPr/>
-        </p:nvSpPr>
-        <p:spPr>
-          <a:xfrm>
-            <a:off x="7955279" y="1783080"/>
-            <a:ext cx="3429000" cy="2286000"/>
-          </a:xfrm>
-          <a:prstGeom prst="roundRect">
-            <a:avLst>
-              <a:gd name="adj" fmla="val 8000"/>
-            </a:avLst>
-          </a:prstGeom>
-          <a:solidFill>
-            <a:srgbClr val="132A26"/>
-          </a:solidFill>
-          <a:ln w="15875">
-            <a:solidFill>
-              <a:srgbClr val="3FC19F"/>
-            </a:solidFill>
-          </a:ln>
-          <a:effectLst/>
-        </p:spPr>
-        <p:style>
-          <a:lnRef idx="1">
-            <a:schemeClr val="accent1"/>
-          </a:lnRef>
-          <a:fillRef idx="3">
-            <a:schemeClr val="accent1"/>
-          </a:fillRef>
-          <a:effectRef idx="2">
-            <a:schemeClr val="accent1"/>
-          </a:effectRef>
-          <a:fontRef idx="minor">
-            <a:schemeClr val="lt1"/>
-          </a:fontRef>
-        </p:style>
-        <p:txBody>
-          <a:bodyPr rtlCol="0" anchor="ctr"/>
-          <a:lstStyle/>
-          <a:p>
-            <a:pPr algn="ctr"/>
-          </a:p>
-        </p:txBody>
-      </p:sp>
-      <p:sp>
-        <p:nvSpPr>
-          <p:cNvPr id="14" name="TextBox 13"/>
-          <p:cNvSpPr txBox="1"/>
-          <p:nvPr/>
-        </p:nvSpPr>
-        <p:spPr>
-          <a:xfrm>
-            <a:off x="8156448" y="1947672"/>
-            <a:ext cx="3026664" cy="457200"/>
-          </a:xfrm>
-          <a:prstGeom prst="rect">
-            <a:avLst/>
-          </a:prstGeom>
-          <a:noFill/>
-        </p:spPr>
-        <p:txBody>
-          <a:bodyPr wrap="square" anchor="t">
-            <a:spAutoFit/>
-          </a:bodyPr>
-          <a:lstStyle/>
-          <a:p>
-            <a:pPr algn="l">
-              <a:spcAft>
-                <a:spcPts val="600"/>
-              </a:spcAft>
-            </a:pPr>
-            <a:r>
-              <a:rPr sz="1600" b="1">
-                <a:solidFill>
-                  <a:srgbClr val="3FC19F"/>
-                </a:solidFill>
-                <a:latin typeface="Segoe UI"/>
-              </a:rPr>
-              <a:t>Menos peticiones</a:t>
-            </a:r>
-          </a:p>
-        </p:txBody>
-      </p:sp>
-      <p:sp>
-        <p:nvSpPr>
-          <p:cNvPr id="15" name="TextBox 14"/>
-          <p:cNvSpPr txBox="1"/>
-          <p:nvPr/>
-        </p:nvSpPr>
-        <p:spPr>
-          <a:xfrm>
-            <a:off x="8156448" y="2441448"/>
-            <a:ext cx="3026664" cy="1463040"/>
-          </a:xfrm>
-          <a:prstGeom prst="rect">
-            <a:avLst/>
-          </a:prstGeom>
-          <a:noFill/>
-        </p:spPr>
-        <p:txBody>
-          <a:bodyPr wrap="square" anchor="t">
-            <a:spAutoFit/>
-          </a:bodyPr>
-          <a:lstStyle/>
-          <a:p>
-            <a:pPr algn="l">
-              <a:spcAft>
-                <a:spcPts val="400"/>
-              </a:spcAft>
-            </a:pPr>
-            <a:r>
-              <a:rPr sz="1300" b="0">
-                <a:solidFill>
-                  <a:srgbClr val="F2F7F5"/>
-                </a:solidFill>
-                <a:latin typeface="Segoe UI"/>
-              </a:rPr>
-              <a:t>Los avisos se pausan con la pestaña oculta.</a:t>
-            </a:r>
-          </a:p>
-          <a:p>
-            <a:pPr algn="l">
-              <a:spcAft>
-                <a:spcPts val="400"/>
-              </a:spcAft>
-            </a:pPr>
-            <a:r>
-              <a:rPr sz="1300" b="0">
-                <a:solidFill>
-                  <a:srgbClr val="F2F7F5"/>
-                </a:solidFill>
-                <a:latin typeface="Segoe UI"/>
-              </a:rPr>
-              <a:t>El sondeo es más espaciado.</a:t>
-            </a:r>
-          </a:p>
-        </p:txBody>
-      </p:sp>
-      <p:sp>
-        <p:nvSpPr>
-          <p:cNvPr id="16" name="TextBox 15"/>
-          <p:cNvSpPr txBox="1"/>
-          <p:nvPr/>
-        </p:nvSpPr>
-        <p:spPr>
-          <a:xfrm>
-            <a:off x="960120" y="4434840"/>
-            <a:ext cx="10332720" cy="1463040"/>
-          </a:xfrm>
-          <a:prstGeom prst="rect">
-            <a:avLst/>
-          </a:prstGeom>
-          <a:noFill/>
-        </p:spPr>
-        <p:txBody>
-          <a:bodyPr wrap="square">
-            <a:spAutoFit/>
-          </a:bodyPr>
-          <a:lstStyle/>
-          <a:p>
-            <a:pPr>
-              <a:spcAft>
-                <a:spcPts val="1000"/>
-              </a:spcAft>
-            </a:pPr>
-            <a:r>
-              <a:rPr sz="1500">
-                <a:solidFill>
-                  <a:srgbClr val="3FC19F"/>
-                </a:solidFill>
-                <a:latin typeface="Segoe UI"/>
-              </a:rPr>
-              <a:t>▸  </a:t>
-            </a:r>
-            <a:r>
-              <a:rPr sz="1500">
-                <a:solidFill>
-                  <a:srgbClr val="F2F7F5"/>
-                </a:solidFill>
-                <a:latin typeface="Segoe UI"/>
-              </a:rPr>
-              <a:t>Fondos a resolución real de pantalla, sin estiramientos.</a:t>
-            </a:r>
-          </a:p>
-          <a:p>
-            <a:pPr>
-              <a:spcAft>
-                <a:spcPts val="1000"/>
-              </a:spcAft>
-            </a:pPr>
-            <a:r>
-              <a:rPr sz="1500">
-                <a:solidFill>
-                  <a:srgbClr val="3FC19F"/>
-                </a:solidFill>
-                <a:latin typeface="Segoe UI"/>
-              </a:rPr>
-              <a:t>▸  </a:t>
-            </a:r>
-            <a:r>
-              <a:rPr sz="1500">
-                <a:solidFill>
-                  <a:srgbClr val="F2F7F5"/>
-                </a:solidFill>
-                <a:latin typeface="Segoe UI"/>
-              </a:rPr>
-              <a:t>La hoja del tema entra en el primer dibujado: sin parpadeo al recargar.</a:t>
-            </a:r>
-          </a:p>
-        </p:txBody>
-      </p:sp>
+      <p:pic>
+        <p:nvPicPr>
+          <p:cNvPr id="8" name="Picture 7" descr="13-ia-tutorutt.png"/>
+          <p:cNvPicPr>
+            <a:picLocks noChangeAspect="1"/>
+          </p:cNvPicPr>
+          <p:nvPr/>
+        </p:nvPicPr>
+        <p:blipFill>
+          <a:blip r:embed="rId2"/>
+          <a:stretch>
+            <a:fillRect/>
+          </a:stretch>
+        </p:blipFill>
+        <p:spPr>
+          <a:xfrm>
+            <a:off x="8739443" y="1691640"/>
+            <a:ext cx="2455033" cy="4023360"/>
+          </a:xfrm>
+          <a:prstGeom prst="rect">
+            <a:avLst/>
+          </a:prstGeom>
+        </p:spPr>
+      </p:pic>
     </p:spTree>
   </p:cSld>
   <p:clrMapOvr>
@@ -11391,7 +12277,7 @@
                 </a:solidFill>
                 <a:latin typeface="Segoe UI Semibold"/>
               </a:rPr>
-              <a:t>Seguridad en conjunto</a:t>
+              <a:t>El chat</a:t>
             </a:r>
           </a:p>
         </p:txBody>
@@ -11430,7 +12316,7 @@
                 </a:solidFill>
                 <a:latin typeface="Segoe UI"/>
               </a:rPr>
-              <a:t>Capas, no una sola puerta</a:t>
+              <a:t>Conversación entre estudiantes</a:t>
             </a:r>
           </a:p>
         </p:txBody>
@@ -11482,8 +12368,8 @@
         </p:nvSpPr>
         <p:spPr>
           <a:xfrm>
-            <a:off x="960120" y="1737360"/>
-            <a:ext cx="10332720" cy="4206240"/>
+            <a:off x="960120" y="1691640"/>
+            <a:ext cx="10332720" cy="3931920"/>
           </a:xfrm>
           <a:prstGeom prst="rect">
             <a:avLst/>
@@ -11502,7 +12388,7 @@
               </a:spcAft>
             </a:pPr>
             <a:r>
-              <a:rPr sz="1700">
+              <a:rPr sz="1600">
                 <a:solidFill>
                   <a:srgbClr val="3FC19F"/>
                 </a:solidFill>
@@ -11511,13 +12397,13 @@
               <a:t>▸  </a:t>
             </a:r>
             <a:r>
-              <a:rPr sz="1700">
+              <a:rPr sz="1600">
                 <a:solidFill>
                   <a:srgbClr val="F2F7F5"/>
                 </a:solidFill>
                 <a:latin typeface="Segoe UI"/>
               </a:rPr>
-              <a:t>HTTPS y cookies seguras en todo el sitio público.</a:t>
+              <a:t>Se abre desde cualquier página, y siempre en la lista de usuarios.</a:t>
             </a:r>
           </a:p>
           <a:p>
@@ -11527,7 +12413,7 @@
               </a:spcAft>
             </a:pPr>
             <a:r>
-              <a:rPr sz="1700">
+              <a:rPr sz="1600">
                 <a:solidFill>
                   <a:srgbClr val="3FC19F"/>
                 </a:solidFill>
@@ -11536,13 +12422,13 @@
               <a:t>▸  </a:t>
             </a:r>
             <a:r>
-              <a:rPr sz="1700">
+              <a:rPr sz="1600">
                 <a:solidFill>
                   <a:srgbClr val="F2F7F5"/>
                 </a:solidFill>
                 <a:latin typeface="Segoe UI"/>
               </a:rPr>
-              <a:t>Contraseñas con hash; nunca en texto plano.</a:t>
+              <a:t>Aviso de «está escribiendo» y marca de «visto».</a:t>
             </a:r>
           </a:p>
           <a:p>
@@ -11552,7 +12438,7 @@
               </a:spcAft>
             </a:pPr>
             <a:r>
-              <a:rPr sz="1700">
+              <a:rPr sz="1600">
                 <a:solidFill>
                   <a:srgbClr val="3FC19F"/>
                 </a:solidFill>
@@ -11561,13 +12447,13 @@
               <a:t>▸  </a:t>
             </a:r>
             <a:r>
-              <a:rPr sz="1700">
+              <a:rPr sz="1600">
                 <a:solidFill>
                   <a:srgbClr val="F2F7F5"/>
                 </a:solidFill>
                 <a:latin typeface="Segoe UI"/>
               </a:rPr>
-              <a:t>Verificación en dos pasos con Google Authenticator.</a:t>
+              <a:t>Contador de mensajes sin leer junto a cada persona.</a:t>
             </a:r>
           </a:p>
           <a:p>
@@ -11577,7 +12463,7 @@
               </a:spcAft>
             </a:pPr>
             <a:r>
-              <a:rPr sz="1700">
+              <a:rPr sz="1600">
                 <a:solidFill>
                   <a:srgbClr val="3FC19F"/>
                 </a:solidFill>
@@ -11586,13 +12472,13 @@
               <a:t>▸  </a:t>
             </a:r>
             <a:r>
-              <a:rPr sz="1700">
+              <a:rPr sz="1600">
                 <a:solidFill>
                   <a:srgbClr val="F2F7F5"/>
                 </a:solidFill>
                 <a:latin typeface="Segoe UI"/>
               </a:rPr>
-              <a:t>Permisos de administrador comprobados en el servidor, no en la interfaz.</a:t>
+              <a:t>El «visto» solo se marca cuando de verdad se abre la conversación.</a:t>
             </a:r>
           </a:p>
           <a:p>
@@ -11602,7 +12488,7 @@
               </a:spcAft>
             </a:pPr>
             <a:r>
-              <a:rPr sz="1700">
+              <a:rPr sz="1600">
                 <a:solidFill>
                   <a:srgbClr val="3FC19F"/>
                 </a:solidFill>
@@ -11611,13 +12497,13 @@
               <a:t>▸  </a:t>
             </a:r>
             <a:r>
-              <a:rPr sz="1700">
+              <a:rPr sz="1600">
                 <a:solidFill>
                   <a:srgbClr val="F2F7F5"/>
                 </a:solidFill>
                 <a:latin typeface="Segoe UI"/>
               </a:rPr>
-              <a:t>Límites de peticiones por usuario, no por dirección IP.</a:t>
+              <a:t>Si estás leyendo, suena el aviso pero no salta la notificación.</a:t>
             </a:r>
           </a:p>
           <a:p>
@@ -11627,7 +12513,7 @@
               </a:spcAft>
             </a:pPr>
             <a:r>
-              <a:rPr sz="1700">
+              <a:rPr sz="1600">
                 <a:solidFill>
                   <a:srgbClr val="3FC19F"/>
                 </a:solidFill>
@@ -11636,42 +12522,87 @@
               <a:t>▸  </a:t>
             </a:r>
             <a:r>
-              <a:rPr sz="1700">
+              <a:rPr sz="1600">
                 <a:solidFill>
                   <a:srgbClr val="F2F7F5"/>
                 </a:solidFill>
                 <a:latin typeface="Segoe UI"/>
               </a:rPr>
-              <a:t>Moderación de imágenes y antivirus en cada archivo.</a:t>
-            </a:r>
-          </a:p>
-          <a:p>
-            <a:pPr>
-              <a:spcAft>
-                <a:spcPts val="1000"/>
-              </a:spcAft>
-            </a:pPr>
-            <a:r>
-              <a:rPr sz="1700">
-                <a:solidFill>
-                  <a:srgbClr val="3FC19F"/>
-                </a:solidFill>
-                <a:latin typeface="Segoe UI"/>
-              </a:rPr>
-              <a:t>▸  </a:t>
-            </a:r>
-            <a:r>
-              <a:rPr sz="1700">
-                <a:solidFill>
-                  <a:srgbClr val="F2F7F5"/>
-                </a:solidFill>
-                <a:latin typeface="Segoe UI"/>
-              </a:rPr>
-              <a:t>Pases firmados para los escritorios.</a:t>
-            </a:r>
-          </a:p>
-        </p:txBody>
-      </p:sp>
+              <a:t>Los avisos se pausan cuando la pestaña está en segundo plano.</a:t>
+            </a:r>
+          </a:p>
+        </p:txBody>
+      </p:sp>
+      <p:sp>
+        <p:nvSpPr>
+          <p:cNvPr id="9" name="Rounded Rectangle 8"/>
+          <p:cNvSpPr/>
+          <p:nvPr/>
+        </p:nvSpPr>
+        <p:spPr>
+          <a:xfrm>
+            <a:off x="6729984" y="2328843"/>
+            <a:ext cx="4828032" cy="2840393"/>
+          </a:xfrm>
+          <a:prstGeom prst="roundRect">
+            <a:avLst>
+              <a:gd name="adj" fmla="val 3000"/>
+            </a:avLst>
+          </a:prstGeom>
+          <a:noFill/>
+          <a:ln w="12700">
+            <a:solidFill>
+              <a:srgbClr val="1F6F5C"/>
+            </a:solidFill>
+          </a:ln>
+          <a:effectLst/>
+        </p:spPr>
+        <p:style>
+          <a:lnRef idx="1">
+            <a:schemeClr val="accent1"/>
+          </a:lnRef>
+          <a:fillRef idx="3">
+            <a:schemeClr val="accent1"/>
+          </a:fillRef>
+          <a:effectRef idx="2">
+            <a:schemeClr val="accent1"/>
+          </a:effectRef>
+          <a:fontRef idx="minor">
+            <a:schemeClr val="lt1"/>
+          </a:fontRef>
+        </p:style>
+        <p:txBody>
+          <a:bodyPr rtlCol="0" anchor="ctr"/>
+          <a:lstStyle/>
+          <a:p>
+            <a:pPr algn="ctr"/>
+          </a:p>
+        </p:txBody>
+      </p:sp>
+      <p:pic>
+        <p:nvPicPr>
+          <p:cNvPr id="8" name="Picture 7" descr="12-contenedor-chat.png"/>
+          <p:cNvPicPr>
+            <a:picLocks noChangeAspect="1"/>
+          </p:cNvPicPr>
+          <p:nvPr/>
+        </p:nvPicPr>
+        <p:blipFill>
+          <a:blip r:embed="rId2"/>
+          <a:stretch>
+            <a:fillRect/>
+          </a:stretch>
+        </p:blipFill>
+        <p:spPr>
+          <a:xfrm>
+            <a:off x="6766560" y="2365419"/>
+            <a:ext cx="4754880" cy="2767241"/>
+          </a:xfrm>
+          <a:prstGeom prst="rect">
+            <a:avLst/>
+          </a:prstGeom>
+        </p:spPr>
+      </p:pic>
     </p:spTree>
   </p:cSld>
   <p:clrMapOvr>
@@ -11811,7 +12742,7 @@
                 </a:solidFill>
                 <a:latin typeface="Segoe UI Semibold"/>
               </a:rPr>
-              <a:t>Así se ve</a:t>
+              <a:t>Hecho para equipos modestos</a:t>
             </a:r>
           </a:p>
         </p:txBody>
@@ -11850,7 +12781,7 @@
                 </a:solidFill>
                 <a:latin typeface="Segoe UI"/>
               </a:rPr>
-              <a:t>Capturas del sistema en uso</a:t>
+              <a:t>Cada decisión pensada en un Core 2 Duo</a:t>
             </a:r>
           </a:p>
         </p:txBody>
@@ -11896,24 +12827,26 @@
       </p:sp>
       <p:sp>
         <p:nvSpPr>
-          <p:cNvPr id="8" name="Rounded Rectangle 7"/>
+          <p:cNvPr id="7" name="Rounded Rectangle 6"/>
           <p:cNvSpPr/>
           <p:nvPr/>
         </p:nvSpPr>
         <p:spPr>
           <a:xfrm>
-            <a:off x="953437" y="1655064"/>
-            <a:ext cx="4859684" cy="2267712"/>
+            <a:off x="822960" y="1783080"/>
+            <a:ext cx="3429000" cy="2286000"/>
           </a:xfrm>
           <a:prstGeom prst="roundRect">
             <a:avLst>
-              <a:gd name="adj" fmla="val 3000"/>
+              <a:gd name="adj" fmla="val 8000"/>
             </a:avLst>
           </a:prstGeom>
-          <a:noFill/>
-          <a:ln w="12700">
+          <a:solidFill>
+            <a:srgbClr val="132A26"/>
+          </a:solidFill>
+          <a:ln w="15875">
             <a:solidFill>
-              <a:srgbClr val="1F6F5C"/>
+              <a:srgbClr val="3FC19F"/>
             </a:solidFill>
           </a:ln>
           <a:effectLst/>
@@ -11940,30 +12873,84 @@
           </a:p>
         </p:txBody>
       </p:sp>
-      <p:pic>
-        <p:nvPicPr>
-          <p:cNvPr id="7" name="Picture 6" descr="18-inicio-admin.png"/>
-          <p:cNvPicPr>
-            <a:picLocks noChangeAspect="1"/>
-          </p:cNvPicPr>
-          <p:nvPr/>
-        </p:nvPicPr>
-        <p:blipFill>
-          <a:blip r:embed="rId2"/>
-          <a:stretch>
-            <a:fillRect/>
-          </a:stretch>
-        </p:blipFill>
-        <p:spPr>
-          <a:xfrm>
-            <a:off x="990013" y="1691640"/>
-            <a:ext cx="4786532" cy="2194560"/>
-          </a:xfrm>
-          <a:prstGeom prst="rect">
-            <a:avLst/>
-          </a:prstGeom>
-        </p:spPr>
-      </p:pic>
+      <p:sp>
+        <p:nvSpPr>
+          <p:cNvPr id="8" name="TextBox 7"/>
+          <p:cNvSpPr txBox="1"/>
+          <p:nvPr/>
+        </p:nvSpPr>
+        <p:spPr>
+          <a:xfrm>
+            <a:off x="1024128" y="1947672"/>
+            <a:ext cx="3026664" cy="457200"/>
+          </a:xfrm>
+          <a:prstGeom prst="rect">
+            <a:avLst/>
+          </a:prstGeom>
+          <a:noFill/>
+        </p:spPr>
+        <p:txBody>
+          <a:bodyPr wrap="square" anchor="t">
+            <a:spAutoFit/>
+          </a:bodyPr>
+          <a:lstStyle/>
+          <a:p>
+            <a:pPr algn="l">
+              <a:spcAft>
+                <a:spcPts val="600"/>
+              </a:spcAft>
+            </a:pPr>
+            <a:r>
+              <a:rPr sz="1600" b="1">
+                <a:solidFill>
+                  <a:srgbClr val="3FC19F"/>
+                </a:solidFill>
+                <a:latin typeface="Segoe UI"/>
+              </a:rPr>
+              <a:t>Detección automática</a:t>
+            </a:r>
+          </a:p>
+        </p:txBody>
+      </p:sp>
+      <p:sp>
+        <p:nvSpPr>
+          <p:cNvPr id="9" name="TextBox 8"/>
+          <p:cNvSpPr txBox="1"/>
+          <p:nvPr/>
+        </p:nvSpPr>
+        <p:spPr>
+          <a:xfrm>
+            <a:off x="1024128" y="2441448"/>
+            <a:ext cx="3026664" cy="1463040"/>
+          </a:xfrm>
+          <a:prstGeom prst="rect">
+            <a:avLst/>
+          </a:prstGeom>
+          <a:noFill/>
+        </p:spPr>
+        <p:txBody>
+          <a:bodyPr wrap="square" anchor="t">
+            <a:spAutoFit/>
+          </a:bodyPr>
+          <a:lstStyle/>
+          <a:p>
+            <a:pPr algn="l">
+              <a:spcAft>
+                <a:spcPts val="400"/>
+              </a:spcAft>
+            </a:pPr>
+            <a:r>
+              <a:rPr sz="1300" b="0">
+                <a:solidFill>
+                  <a:srgbClr val="F2F7F5"/>
+                </a:solidFill>
+                <a:latin typeface="Segoe UI"/>
+              </a:rPr>
+              <a:t>Si el equipo tiene pocos núcleos o poca memoria, se activa el modo ligero.</a:t>
+            </a:r>
+          </a:p>
+        </p:txBody>
+      </p:sp>
       <p:sp>
         <p:nvSpPr>
           <p:cNvPr id="10" name="Rounded Rectangle 9"/>
@@ -11972,18 +12959,20 @@
         </p:nvSpPr>
         <p:spPr>
           <a:xfrm>
-            <a:off x="7262487" y="1655064"/>
-            <a:ext cx="3397264" cy="2267712"/>
+            <a:off x="4389120" y="1783080"/>
+            <a:ext cx="3429000" cy="2286000"/>
           </a:xfrm>
           <a:prstGeom prst="roundRect">
             <a:avLst>
-              <a:gd name="adj" fmla="val 3000"/>
+              <a:gd name="adj" fmla="val 8000"/>
             </a:avLst>
           </a:prstGeom>
-          <a:noFill/>
-          <a:ln w="12700">
+          <a:solidFill>
+            <a:srgbClr val="132A26"/>
+          </a:solidFill>
+          <a:ln w="15875">
             <a:solidFill>
-              <a:srgbClr val="1F6F5C"/>
+              <a:srgbClr val="3FC19F"/>
             </a:solidFill>
           </a:ln>
           <a:effectLst/>
@@ -12010,50 +12999,106 @@
           </a:p>
         </p:txBody>
       </p:sp>
-      <p:pic>
-        <p:nvPicPr>
-          <p:cNvPr id="9" name="Picture 8" descr="17-crear-publicacion.png"/>
-          <p:cNvPicPr>
-            <a:picLocks noChangeAspect="1"/>
-          </p:cNvPicPr>
-          <p:nvPr/>
-        </p:nvPicPr>
-        <p:blipFill>
-          <a:blip r:embed="rId3"/>
-          <a:stretch>
-            <a:fillRect/>
-          </a:stretch>
-        </p:blipFill>
-        <p:spPr>
-          <a:xfrm>
-            <a:off x="7299063" y="1691640"/>
-            <a:ext cx="3324112" cy="2194560"/>
-          </a:xfrm>
-          <a:prstGeom prst="rect">
-            <a:avLst/>
-          </a:prstGeom>
-        </p:spPr>
-      </p:pic>
-      <p:sp>
-        <p:nvSpPr>
-          <p:cNvPr id="12" name="Rounded Rectangle 11"/>
+      <p:sp>
+        <p:nvSpPr>
+          <p:cNvPr id="11" name="TextBox 10"/>
+          <p:cNvSpPr txBox="1"/>
+          <p:nvPr/>
+        </p:nvSpPr>
+        <p:spPr>
+          <a:xfrm>
+            <a:off x="4590288" y="1947672"/>
+            <a:ext cx="3026664" cy="457200"/>
+          </a:xfrm>
+          <a:prstGeom prst="rect">
+            <a:avLst/>
+          </a:prstGeom>
+          <a:noFill/>
+        </p:spPr>
+        <p:txBody>
+          <a:bodyPr wrap="square" anchor="t">
+            <a:spAutoFit/>
+          </a:bodyPr>
+          <a:lstStyle/>
+          <a:p>
+            <a:pPr algn="l">
+              <a:spcAft>
+                <a:spcPts val="600"/>
+              </a:spcAft>
+            </a:pPr>
+            <a:r>
+              <a:rPr sz="1600" b="1">
+                <a:solidFill>
+                  <a:srgbClr val="3FC19F"/>
+                </a:solidFill>
+                <a:latin typeface="Segoe UI"/>
+              </a:rPr>
+              <a:t>Menos efectos</a:t>
+            </a:r>
+          </a:p>
+        </p:txBody>
+      </p:sp>
+      <p:sp>
+        <p:nvSpPr>
+          <p:cNvPr id="12" name="TextBox 11"/>
+          <p:cNvSpPr txBox="1"/>
+          <p:nvPr/>
+        </p:nvSpPr>
+        <p:spPr>
+          <a:xfrm>
+            <a:off x="4590288" y="2441448"/>
+            <a:ext cx="3026664" cy="1463040"/>
+          </a:xfrm>
+          <a:prstGeom prst="rect">
+            <a:avLst/>
+          </a:prstGeom>
+          <a:noFill/>
+        </p:spPr>
+        <p:txBody>
+          <a:bodyPr wrap="square" anchor="t">
+            <a:spAutoFit/>
+          </a:bodyPr>
+          <a:lstStyle/>
+          <a:p>
+            <a:pPr algn="l">
+              <a:spcAft>
+                <a:spcPts val="400"/>
+              </a:spcAft>
+            </a:pPr>
+            <a:r>
+              <a:rPr sz="1300" b="0">
+                <a:solidFill>
+                  <a:srgbClr val="F2F7F5"/>
+                </a:solidFill>
+                <a:latin typeface="Segoe UI"/>
+              </a:rPr>
+              <a:t>Se apagan desenfoques y fondos fijos: es lo que más cuesta dibujar.</a:t>
+            </a:r>
+          </a:p>
+        </p:txBody>
+      </p:sp>
+      <p:sp>
+        <p:nvSpPr>
+          <p:cNvPr id="13" name="Rounded Rectangle 12"/>
           <p:cNvSpPr/>
           <p:nvPr/>
         </p:nvSpPr>
         <p:spPr>
           <a:xfrm>
-            <a:off x="1461276" y="3986784"/>
-            <a:ext cx="3844007" cy="2267712"/>
+            <a:off x="7955279" y="1783080"/>
+            <a:ext cx="3429000" cy="2286000"/>
           </a:xfrm>
           <a:prstGeom prst="roundRect">
             <a:avLst>
-              <a:gd name="adj" fmla="val 3000"/>
+              <a:gd name="adj" fmla="val 8000"/>
             </a:avLst>
           </a:prstGeom>
-          <a:noFill/>
-          <a:ln w="12700">
+          <a:solidFill>
+            <a:srgbClr val="132A26"/>
+          </a:solidFill>
+          <a:ln w="15875">
             <a:solidFill>
-              <a:srgbClr val="1F6F5C"/>
+              <a:srgbClr val="3FC19F"/>
             </a:solidFill>
           </a:ln>
           <a:effectLst/>
@@ -12080,100 +13125,173 @@
           </a:p>
         </p:txBody>
       </p:sp>
-      <p:pic>
-        <p:nvPicPr>
-          <p:cNvPr id="11" name="Picture 10" descr="12-contenedor-chat.png"/>
-          <p:cNvPicPr>
-            <a:picLocks noChangeAspect="1"/>
-          </p:cNvPicPr>
-          <p:nvPr/>
-        </p:nvPicPr>
-        <p:blipFill>
-          <a:blip r:embed="rId4"/>
-          <a:stretch>
-            <a:fillRect/>
-          </a:stretch>
-        </p:blipFill>
-        <p:spPr>
-          <a:xfrm>
-            <a:off x="1497852" y="4023360"/>
-            <a:ext cx="3770855" cy="2194560"/>
-          </a:xfrm>
-          <a:prstGeom prst="rect">
-            <a:avLst/>
-          </a:prstGeom>
-        </p:spPr>
-      </p:pic>
-      <p:sp>
-        <p:nvSpPr>
-          <p:cNvPr id="14" name="Rounded Rectangle 13"/>
-          <p:cNvSpPr/>
-          <p:nvPr/>
-        </p:nvSpPr>
-        <p:spPr>
-          <a:xfrm>
-            <a:off x="7284581" y="3986784"/>
-            <a:ext cx="3353076" cy="2267712"/>
-          </a:xfrm>
-          <a:prstGeom prst="roundRect">
-            <a:avLst>
-              <a:gd name="adj" fmla="val 3000"/>
-            </a:avLst>
-          </a:prstGeom>
-          <a:noFill/>
-          <a:ln w="12700">
-            <a:solidFill>
-              <a:srgbClr val="1F6F5C"/>
-            </a:solidFill>
-          </a:ln>
-          <a:effectLst/>
-        </p:spPr>
-        <p:style>
-          <a:lnRef idx="1">
-            <a:schemeClr val="accent1"/>
-          </a:lnRef>
-          <a:fillRef idx="3">
-            <a:schemeClr val="accent1"/>
-          </a:fillRef>
-          <a:effectRef idx="2">
-            <a:schemeClr val="accent1"/>
-          </a:effectRef>
-          <a:fontRef idx="minor">
-            <a:schemeClr val="lt1"/>
-          </a:fontRef>
-        </p:style>
-        <p:txBody>
-          <a:bodyPr rtlCol="0" anchor="ctr"/>
-          <a:lstStyle/>
-          <a:p>
-            <a:pPr algn="ctr"/>
-          </a:p>
-        </p:txBody>
-      </p:sp>
-      <p:pic>
-        <p:nvPicPr>
-          <p:cNvPr id="13" name="Picture 12" descr="15-ventana-nueva.png"/>
-          <p:cNvPicPr>
-            <a:picLocks noChangeAspect="1"/>
-          </p:cNvPicPr>
-          <p:nvPr/>
-        </p:nvPicPr>
-        <p:blipFill>
-          <a:blip r:embed="rId5"/>
-          <a:stretch>
-            <a:fillRect/>
-          </a:stretch>
-        </p:blipFill>
-        <p:spPr>
-          <a:xfrm>
-            <a:off x="7321157" y="4023360"/>
-            <a:ext cx="3279924" cy="2194560"/>
-          </a:xfrm>
-          <a:prstGeom prst="rect">
-            <a:avLst/>
-          </a:prstGeom>
-        </p:spPr>
-      </p:pic>
+      <p:sp>
+        <p:nvSpPr>
+          <p:cNvPr id="14" name="TextBox 13"/>
+          <p:cNvSpPr txBox="1"/>
+          <p:nvPr/>
+        </p:nvSpPr>
+        <p:spPr>
+          <a:xfrm>
+            <a:off x="8156448" y="1947672"/>
+            <a:ext cx="3026664" cy="457200"/>
+          </a:xfrm>
+          <a:prstGeom prst="rect">
+            <a:avLst/>
+          </a:prstGeom>
+          <a:noFill/>
+        </p:spPr>
+        <p:txBody>
+          <a:bodyPr wrap="square" anchor="t">
+            <a:spAutoFit/>
+          </a:bodyPr>
+          <a:lstStyle/>
+          <a:p>
+            <a:pPr algn="l">
+              <a:spcAft>
+                <a:spcPts val="600"/>
+              </a:spcAft>
+            </a:pPr>
+            <a:r>
+              <a:rPr sz="1600" b="1">
+                <a:solidFill>
+                  <a:srgbClr val="3FC19F"/>
+                </a:solidFill>
+                <a:latin typeface="Segoe UI"/>
+              </a:rPr>
+              <a:t>Menos peticiones</a:t>
+            </a:r>
+          </a:p>
+        </p:txBody>
+      </p:sp>
+      <p:sp>
+        <p:nvSpPr>
+          <p:cNvPr id="15" name="TextBox 14"/>
+          <p:cNvSpPr txBox="1"/>
+          <p:nvPr/>
+        </p:nvSpPr>
+        <p:spPr>
+          <a:xfrm>
+            <a:off x="8156448" y="2441448"/>
+            <a:ext cx="3026664" cy="1463040"/>
+          </a:xfrm>
+          <a:prstGeom prst="rect">
+            <a:avLst/>
+          </a:prstGeom>
+          <a:noFill/>
+        </p:spPr>
+        <p:txBody>
+          <a:bodyPr wrap="square" anchor="t">
+            <a:spAutoFit/>
+          </a:bodyPr>
+          <a:lstStyle/>
+          <a:p>
+            <a:pPr algn="l">
+              <a:spcAft>
+                <a:spcPts val="400"/>
+              </a:spcAft>
+            </a:pPr>
+            <a:r>
+              <a:rPr sz="1300" b="0">
+                <a:solidFill>
+                  <a:srgbClr val="F2F7F5"/>
+                </a:solidFill>
+                <a:latin typeface="Segoe UI"/>
+              </a:rPr>
+              <a:t>Los avisos se pausan con la pestaña oculta.</a:t>
+            </a:r>
+          </a:p>
+          <a:p>
+            <a:pPr algn="l">
+              <a:spcAft>
+                <a:spcPts val="400"/>
+              </a:spcAft>
+            </a:pPr>
+            <a:r>
+              <a:rPr sz="1300" b="0">
+                <a:solidFill>
+                  <a:srgbClr val="F2F7F5"/>
+                </a:solidFill>
+                <a:latin typeface="Segoe UI"/>
+              </a:rPr>
+              <a:t>El sondeo es más espaciado.</a:t>
+            </a:r>
+          </a:p>
+        </p:txBody>
+      </p:sp>
+      <p:sp>
+        <p:nvSpPr>
+          <p:cNvPr id="16" name="TextBox 15"/>
+          <p:cNvSpPr txBox="1"/>
+          <p:nvPr/>
+        </p:nvSpPr>
+        <p:spPr>
+          <a:xfrm>
+            <a:off x="960120" y="4434840"/>
+            <a:ext cx="10332720" cy="1463040"/>
+          </a:xfrm>
+          <a:prstGeom prst="rect">
+            <a:avLst/>
+          </a:prstGeom>
+          <a:noFill/>
+        </p:spPr>
+        <p:txBody>
+          <a:bodyPr wrap="square">
+            <a:spAutoFit/>
+          </a:bodyPr>
+          <a:lstStyle/>
+          <a:p>
+            <a:pPr>
+              <a:spcAft>
+                <a:spcPts val="1000"/>
+              </a:spcAft>
+            </a:pPr>
+            <a:r>
+              <a:rPr sz="1500">
+                <a:solidFill>
+                  <a:srgbClr val="3FC19F"/>
+                </a:solidFill>
+                <a:latin typeface="Segoe UI"/>
+              </a:rPr>
+              <a:t>▸  </a:t>
+            </a:r>
+            <a:r>
+              <a:rPr sz="1500">
+                <a:solidFill>
+                  <a:srgbClr val="F2F7F5"/>
+                </a:solidFill>
+                <a:latin typeface="Segoe UI"/>
+              </a:rPr>
+              <a:t>Fondos a resolución real de pantalla, sin estiramientos.</a:t>
+            </a:r>
+          </a:p>
+          <a:p>
+            <a:pPr>
+              <a:spcAft>
+                <a:spcPts val="1000"/>
+              </a:spcAft>
+            </a:pPr>
+            <a:r>
+              <a:rPr sz="1500">
+                <a:solidFill>
+                  <a:srgbClr val="3FC19F"/>
+                </a:solidFill>
+                <a:latin typeface="Segoe UI"/>
+              </a:rPr>
+              <a:t>▸  </a:t>
+            </a:r>
+            <a:r>
+              <a:rPr sz="1500">
+                <a:solidFill>
+                  <a:srgbClr val="F2F7F5"/>
+                </a:solidFill>
+                <a:latin typeface="Segoe UI"/>
+              </a:rPr>
+              <a:t>La hoja del tema entra en el primer dibujado: sin parpadeo al recargar.</a:t>
+            </a:r>
+          </a:p>
+        </p:txBody>
+      </p:sp>
     </p:spTree>
   </p:cSld>
   <p:clrMapOvr>
@@ -12207,6 +13325,928 @@
             <a:avLst/>
           </a:prstGeom>
           <a:solidFill>
+            <a:srgbClr val="0C1A18"/>
+          </a:solidFill>
+          <a:ln>
+            <a:noFill/>
+          </a:ln>
+          <a:effectLst/>
+        </p:spPr>
+        <p:style>
+          <a:lnRef idx="1">
+            <a:schemeClr val="accent1"/>
+          </a:lnRef>
+          <a:fillRef idx="3">
+            <a:schemeClr val="accent1"/>
+          </a:fillRef>
+          <a:effectRef idx="2">
+            <a:schemeClr val="accent1"/>
+          </a:effectRef>
+          <a:fontRef idx="minor">
+            <a:schemeClr val="lt1"/>
+          </a:fontRef>
+        </p:style>
+        <p:txBody>
+          <a:bodyPr rtlCol="0" anchor="ctr"/>
+          <a:lstStyle/>
+          <a:p>
+            <a:pPr algn="ctr"/>
+          </a:p>
+        </p:txBody>
+      </p:sp>
+      <p:sp>
+        <p:nvSpPr>
+          <p:cNvPr id="3" name="Rectangle 2"/>
+          <p:cNvSpPr/>
+          <p:nvPr/>
+        </p:nvSpPr>
+        <p:spPr>
+          <a:xfrm>
+            <a:off x="685800" y="502920"/>
+            <a:ext cx="82296" cy="566928"/>
+          </a:xfrm>
+          <a:prstGeom prst="rect">
+            <a:avLst/>
+          </a:prstGeom>
+          <a:solidFill>
+            <a:srgbClr val="3FC19F"/>
+          </a:solidFill>
+          <a:ln>
+            <a:noFill/>
+          </a:ln>
+        </p:spPr>
+        <p:style>
+          <a:lnRef idx="1">
+            <a:schemeClr val="accent1"/>
+          </a:lnRef>
+          <a:fillRef idx="3">
+            <a:schemeClr val="accent1"/>
+          </a:fillRef>
+          <a:effectRef idx="2">
+            <a:schemeClr val="accent1"/>
+          </a:effectRef>
+          <a:fontRef idx="minor">
+            <a:schemeClr val="lt1"/>
+          </a:fontRef>
+        </p:style>
+        <p:txBody>
+          <a:bodyPr rtlCol="0" anchor="ctr"/>
+          <a:lstStyle/>
+          <a:p>
+            <a:pPr algn="ctr"/>
+          </a:p>
+        </p:txBody>
+      </p:sp>
+      <p:sp>
+        <p:nvSpPr>
+          <p:cNvPr id="4" name="TextBox 3"/>
+          <p:cNvSpPr txBox="1"/>
+          <p:nvPr/>
+        </p:nvSpPr>
+        <p:spPr>
+          <a:xfrm>
+            <a:off x="960120" y="438912"/>
+            <a:ext cx="10241280" cy="731520"/>
+          </a:xfrm>
+          <a:prstGeom prst="rect">
+            <a:avLst/>
+          </a:prstGeom>
+          <a:noFill/>
+        </p:spPr>
+        <p:txBody>
+          <a:bodyPr wrap="square" anchor="t">
+            <a:spAutoFit/>
+          </a:bodyPr>
+          <a:lstStyle/>
+          <a:p>
+            <a:pPr algn="l">
+              <a:spcAft>
+                <a:spcPts val="600"/>
+              </a:spcAft>
+            </a:pPr>
+            <a:r>
+              <a:rPr sz="3000" b="1">
+                <a:solidFill>
+                  <a:srgbClr val="F2F7F5"/>
+                </a:solidFill>
+                <a:latin typeface="Segoe UI Semibold"/>
+              </a:rPr>
+              <a:t>Seguridad en conjunto</a:t>
+            </a:r>
+          </a:p>
+        </p:txBody>
+      </p:sp>
+      <p:sp>
+        <p:nvSpPr>
+          <p:cNvPr id="5" name="TextBox 4"/>
+          <p:cNvSpPr txBox="1"/>
+          <p:nvPr/>
+        </p:nvSpPr>
+        <p:spPr>
+          <a:xfrm>
+            <a:off x="960120" y="1060704"/>
+            <a:ext cx="10241280" cy="411480"/>
+          </a:xfrm>
+          <a:prstGeom prst="rect">
+            <a:avLst/>
+          </a:prstGeom>
+          <a:noFill/>
+        </p:spPr>
+        <p:txBody>
+          <a:bodyPr wrap="square" anchor="t">
+            <a:spAutoFit/>
+          </a:bodyPr>
+          <a:lstStyle/>
+          <a:p>
+            <a:pPr algn="l">
+              <a:spcAft>
+                <a:spcPts val="600"/>
+              </a:spcAft>
+            </a:pPr>
+            <a:r>
+              <a:rPr sz="1400" b="0">
+                <a:solidFill>
+                  <a:srgbClr val="9FB4AE"/>
+                </a:solidFill>
+                <a:latin typeface="Segoe UI"/>
+              </a:rPr>
+              <a:t>Capas, no una sola puerta</a:t>
+            </a:r>
+          </a:p>
+        </p:txBody>
+      </p:sp>
+      <p:sp>
+        <p:nvSpPr>
+          <p:cNvPr id="6" name="TextBox 5"/>
+          <p:cNvSpPr txBox="1"/>
+          <p:nvPr/>
+        </p:nvSpPr>
+        <p:spPr>
+          <a:xfrm>
+            <a:off x="11064240" y="6263640"/>
+            <a:ext cx="914400" cy="365760"/>
+          </a:xfrm>
+          <a:prstGeom prst="rect">
+            <a:avLst/>
+          </a:prstGeom>
+          <a:noFill/>
+        </p:spPr>
+        <p:txBody>
+          <a:bodyPr wrap="square" anchor="t">
+            <a:spAutoFit/>
+          </a:bodyPr>
+          <a:lstStyle/>
+          <a:p>
+            <a:pPr algn="r">
+              <a:spcAft>
+                <a:spcPts val="600"/>
+              </a:spcAft>
+            </a:pPr>
+            <a:r>
+              <a:rPr sz="1100" b="0">
+                <a:solidFill>
+                  <a:srgbClr val="9FB4AE"/>
+                </a:solidFill>
+                <a:latin typeface="Segoe UI"/>
+              </a:rPr>
+              <a:t>25</a:t>
+            </a:r>
+          </a:p>
+        </p:txBody>
+      </p:sp>
+      <p:sp>
+        <p:nvSpPr>
+          <p:cNvPr id="7" name="TextBox 6"/>
+          <p:cNvSpPr txBox="1"/>
+          <p:nvPr/>
+        </p:nvSpPr>
+        <p:spPr>
+          <a:xfrm>
+            <a:off x="960120" y="1737360"/>
+            <a:ext cx="10332720" cy="4206240"/>
+          </a:xfrm>
+          <a:prstGeom prst="rect">
+            <a:avLst/>
+          </a:prstGeom>
+          <a:noFill/>
+        </p:spPr>
+        <p:txBody>
+          <a:bodyPr wrap="square">
+            <a:spAutoFit/>
+          </a:bodyPr>
+          <a:lstStyle/>
+          <a:p>
+            <a:pPr>
+              <a:spcAft>
+                <a:spcPts val="1000"/>
+              </a:spcAft>
+            </a:pPr>
+            <a:r>
+              <a:rPr sz="1700">
+                <a:solidFill>
+                  <a:srgbClr val="3FC19F"/>
+                </a:solidFill>
+                <a:latin typeface="Segoe UI"/>
+              </a:rPr>
+              <a:t>▸  </a:t>
+            </a:r>
+            <a:r>
+              <a:rPr sz="1700">
+                <a:solidFill>
+                  <a:srgbClr val="F2F7F5"/>
+                </a:solidFill>
+                <a:latin typeface="Segoe UI"/>
+              </a:rPr>
+              <a:t>HTTPS y cookies seguras en todo el sitio público.</a:t>
+            </a:r>
+          </a:p>
+          <a:p>
+            <a:pPr>
+              <a:spcAft>
+                <a:spcPts val="1000"/>
+              </a:spcAft>
+            </a:pPr>
+            <a:r>
+              <a:rPr sz="1700">
+                <a:solidFill>
+                  <a:srgbClr val="3FC19F"/>
+                </a:solidFill>
+                <a:latin typeface="Segoe UI"/>
+              </a:rPr>
+              <a:t>▸  </a:t>
+            </a:r>
+            <a:r>
+              <a:rPr sz="1700">
+                <a:solidFill>
+                  <a:srgbClr val="F2F7F5"/>
+                </a:solidFill>
+                <a:latin typeface="Segoe UI"/>
+              </a:rPr>
+              <a:t>Contraseñas con hash; nunca en texto plano.</a:t>
+            </a:r>
+          </a:p>
+          <a:p>
+            <a:pPr>
+              <a:spcAft>
+                <a:spcPts val="1000"/>
+              </a:spcAft>
+            </a:pPr>
+            <a:r>
+              <a:rPr sz="1700">
+                <a:solidFill>
+                  <a:srgbClr val="3FC19F"/>
+                </a:solidFill>
+                <a:latin typeface="Segoe UI"/>
+              </a:rPr>
+              <a:t>▸  </a:t>
+            </a:r>
+            <a:r>
+              <a:rPr sz="1700">
+                <a:solidFill>
+                  <a:srgbClr val="F2F7F5"/>
+                </a:solidFill>
+                <a:latin typeface="Segoe UI"/>
+              </a:rPr>
+              <a:t>Verificación en dos pasos con Google Authenticator.</a:t>
+            </a:r>
+          </a:p>
+          <a:p>
+            <a:pPr>
+              <a:spcAft>
+                <a:spcPts val="1000"/>
+              </a:spcAft>
+            </a:pPr>
+            <a:r>
+              <a:rPr sz="1700">
+                <a:solidFill>
+                  <a:srgbClr val="3FC19F"/>
+                </a:solidFill>
+                <a:latin typeface="Segoe UI"/>
+              </a:rPr>
+              <a:t>▸  </a:t>
+            </a:r>
+            <a:r>
+              <a:rPr sz="1700">
+                <a:solidFill>
+                  <a:srgbClr val="F2F7F5"/>
+                </a:solidFill>
+                <a:latin typeface="Segoe UI"/>
+              </a:rPr>
+              <a:t>Permisos de administrador comprobados en el servidor, no en la interfaz.</a:t>
+            </a:r>
+          </a:p>
+          <a:p>
+            <a:pPr>
+              <a:spcAft>
+                <a:spcPts val="1000"/>
+              </a:spcAft>
+            </a:pPr>
+            <a:r>
+              <a:rPr sz="1700">
+                <a:solidFill>
+                  <a:srgbClr val="3FC19F"/>
+                </a:solidFill>
+                <a:latin typeface="Segoe UI"/>
+              </a:rPr>
+              <a:t>▸  </a:t>
+            </a:r>
+            <a:r>
+              <a:rPr sz="1700">
+                <a:solidFill>
+                  <a:srgbClr val="F2F7F5"/>
+                </a:solidFill>
+                <a:latin typeface="Segoe UI"/>
+              </a:rPr>
+              <a:t>Límites de peticiones por usuario, no por dirección IP.</a:t>
+            </a:r>
+          </a:p>
+          <a:p>
+            <a:pPr>
+              <a:spcAft>
+                <a:spcPts val="1000"/>
+              </a:spcAft>
+            </a:pPr>
+            <a:r>
+              <a:rPr sz="1700">
+                <a:solidFill>
+                  <a:srgbClr val="3FC19F"/>
+                </a:solidFill>
+                <a:latin typeface="Segoe UI"/>
+              </a:rPr>
+              <a:t>▸  </a:t>
+            </a:r>
+            <a:r>
+              <a:rPr sz="1700">
+                <a:solidFill>
+                  <a:srgbClr val="F2F7F5"/>
+                </a:solidFill>
+                <a:latin typeface="Segoe UI"/>
+              </a:rPr>
+              <a:t>Moderación de imágenes y antivirus en cada archivo.</a:t>
+            </a:r>
+          </a:p>
+          <a:p>
+            <a:pPr>
+              <a:spcAft>
+                <a:spcPts val="1000"/>
+              </a:spcAft>
+            </a:pPr>
+            <a:r>
+              <a:rPr sz="1700">
+                <a:solidFill>
+                  <a:srgbClr val="3FC19F"/>
+                </a:solidFill>
+                <a:latin typeface="Segoe UI"/>
+              </a:rPr>
+              <a:t>▸  </a:t>
+            </a:r>
+            <a:r>
+              <a:rPr sz="1700">
+                <a:solidFill>
+                  <a:srgbClr val="F2F7F5"/>
+                </a:solidFill>
+                <a:latin typeface="Segoe UI"/>
+              </a:rPr>
+              <a:t>Pases firmados para los escritorios.</a:t>
+            </a:r>
+          </a:p>
+        </p:txBody>
+      </p:sp>
+    </p:spTree>
+  </p:cSld>
+  <p:clrMapOvr>
+    <a:masterClrMapping/>
+  </p:clrMapOvr>
+</p:sld>
+</file>
+
+<file path=ppt/slides/slide26.xml><?xml version="1.0" encoding="utf-8"?>
+<p:sld xmlns:a="http://schemas.openxmlformats.org/drawingml/2006/main" xmlns:p="http://schemas.openxmlformats.org/presentationml/2006/main" xmlns:r="http://schemas.openxmlformats.org/officeDocument/2006/relationships">
+  <p:cSld>
+    <p:spTree>
+      <p:nvGrpSpPr>
+        <p:cNvPr id="1" name=""/>
+        <p:cNvGrpSpPr/>
+        <p:nvPr/>
+      </p:nvGrpSpPr>
+      <p:grpSpPr/>
+      <p:sp>
+        <p:nvSpPr>
+          <p:cNvPr id="2" name="Rectangle 1"/>
+          <p:cNvSpPr/>
+          <p:nvPr/>
+        </p:nvSpPr>
+        <p:spPr>
+          <a:xfrm>
+            <a:off x="0" y="0"/>
+            <a:ext cx="12191695" cy="6858000"/>
+          </a:xfrm>
+          <a:prstGeom prst="rect">
+            <a:avLst/>
+          </a:prstGeom>
+          <a:solidFill>
+            <a:srgbClr val="0C1A18"/>
+          </a:solidFill>
+          <a:ln>
+            <a:noFill/>
+          </a:ln>
+          <a:effectLst/>
+        </p:spPr>
+        <p:style>
+          <a:lnRef idx="1">
+            <a:schemeClr val="accent1"/>
+          </a:lnRef>
+          <a:fillRef idx="3">
+            <a:schemeClr val="accent1"/>
+          </a:fillRef>
+          <a:effectRef idx="2">
+            <a:schemeClr val="accent1"/>
+          </a:effectRef>
+          <a:fontRef idx="minor">
+            <a:schemeClr val="lt1"/>
+          </a:fontRef>
+        </p:style>
+        <p:txBody>
+          <a:bodyPr rtlCol="0" anchor="ctr"/>
+          <a:lstStyle/>
+          <a:p>
+            <a:pPr algn="ctr"/>
+          </a:p>
+        </p:txBody>
+      </p:sp>
+      <p:sp>
+        <p:nvSpPr>
+          <p:cNvPr id="3" name="Rectangle 2"/>
+          <p:cNvSpPr/>
+          <p:nvPr/>
+        </p:nvSpPr>
+        <p:spPr>
+          <a:xfrm>
+            <a:off x="685800" y="502920"/>
+            <a:ext cx="82296" cy="566928"/>
+          </a:xfrm>
+          <a:prstGeom prst="rect">
+            <a:avLst/>
+          </a:prstGeom>
+          <a:solidFill>
+            <a:srgbClr val="3FC19F"/>
+          </a:solidFill>
+          <a:ln>
+            <a:noFill/>
+          </a:ln>
+        </p:spPr>
+        <p:style>
+          <a:lnRef idx="1">
+            <a:schemeClr val="accent1"/>
+          </a:lnRef>
+          <a:fillRef idx="3">
+            <a:schemeClr val="accent1"/>
+          </a:fillRef>
+          <a:effectRef idx="2">
+            <a:schemeClr val="accent1"/>
+          </a:effectRef>
+          <a:fontRef idx="minor">
+            <a:schemeClr val="lt1"/>
+          </a:fontRef>
+        </p:style>
+        <p:txBody>
+          <a:bodyPr rtlCol="0" anchor="ctr"/>
+          <a:lstStyle/>
+          <a:p>
+            <a:pPr algn="ctr"/>
+          </a:p>
+        </p:txBody>
+      </p:sp>
+      <p:sp>
+        <p:nvSpPr>
+          <p:cNvPr id="4" name="TextBox 3"/>
+          <p:cNvSpPr txBox="1"/>
+          <p:nvPr/>
+        </p:nvSpPr>
+        <p:spPr>
+          <a:xfrm>
+            <a:off x="960120" y="438912"/>
+            <a:ext cx="10241280" cy="731520"/>
+          </a:xfrm>
+          <a:prstGeom prst="rect">
+            <a:avLst/>
+          </a:prstGeom>
+          <a:noFill/>
+        </p:spPr>
+        <p:txBody>
+          <a:bodyPr wrap="square" anchor="t">
+            <a:spAutoFit/>
+          </a:bodyPr>
+          <a:lstStyle/>
+          <a:p>
+            <a:pPr algn="l">
+              <a:spcAft>
+                <a:spcPts val="600"/>
+              </a:spcAft>
+            </a:pPr>
+            <a:r>
+              <a:rPr sz="3000" b="1">
+                <a:solidFill>
+                  <a:srgbClr val="F2F7F5"/>
+                </a:solidFill>
+                <a:latin typeface="Segoe UI Semibold"/>
+              </a:rPr>
+              <a:t>Así se ve</a:t>
+            </a:r>
+          </a:p>
+        </p:txBody>
+      </p:sp>
+      <p:sp>
+        <p:nvSpPr>
+          <p:cNvPr id="5" name="TextBox 4"/>
+          <p:cNvSpPr txBox="1"/>
+          <p:nvPr/>
+        </p:nvSpPr>
+        <p:spPr>
+          <a:xfrm>
+            <a:off x="960120" y="1060704"/>
+            <a:ext cx="10241280" cy="411480"/>
+          </a:xfrm>
+          <a:prstGeom prst="rect">
+            <a:avLst/>
+          </a:prstGeom>
+          <a:noFill/>
+        </p:spPr>
+        <p:txBody>
+          <a:bodyPr wrap="square" anchor="t">
+            <a:spAutoFit/>
+          </a:bodyPr>
+          <a:lstStyle/>
+          <a:p>
+            <a:pPr algn="l">
+              <a:spcAft>
+                <a:spcPts val="600"/>
+              </a:spcAft>
+            </a:pPr>
+            <a:r>
+              <a:rPr sz="1400" b="0">
+                <a:solidFill>
+                  <a:srgbClr val="9FB4AE"/>
+                </a:solidFill>
+                <a:latin typeface="Segoe UI"/>
+              </a:rPr>
+              <a:t>Capturas del sistema en uso</a:t>
+            </a:r>
+          </a:p>
+        </p:txBody>
+      </p:sp>
+      <p:sp>
+        <p:nvSpPr>
+          <p:cNvPr id="6" name="TextBox 5"/>
+          <p:cNvSpPr txBox="1"/>
+          <p:nvPr/>
+        </p:nvSpPr>
+        <p:spPr>
+          <a:xfrm>
+            <a:off x="11064240" y="6263640"/>
+            <a:ext cx="914400" cy="365760"/>
+          </a:xfrm>
+          <a:prstGeom prst="rect">
+            <a:avLst/>
+          </a:prstGeom>
+          <a:noFill/>
+        </p:spPr>
+        <p:txBody>
+          <a:bodyPr wrap="square" anchor="t">
+            <a:spAutoFit/>
+          </a:bodyPr>
+          <a:lstStyle/>
+          <a:p>
+            <a:pPr algn="r">
+              <a:spcAft>
+                <a:spcPts val="600"/>
+              </a:spcAft>
+            </a:pPr>
+            <a:r>
+              <a:rPr sz="1100" b="0">
+                <a:solidFill>
+                  <a:srgbClr val="9FB4AE"/>
+                </a:solidFill>
+                <a:latin typeface="Segoe UI"/>
+              </a:rPr>
+              <a:t>26</a:t>
+            </a:r>
+          </a:p>
+        </p:txBody>
+      </p:sp>
+      <p:sp>
+        <p:nvSpPr>
+          <p:cNvPr id="8" name="Rounded Rectangle 7"/>
+          <p:cNvSpPr/>
+          <p:nvPr/>
+        </p:nvSpPr>
+        <p:spPr>
+          <a:xfrm>
+            <a:off x="953437" y="1655064"/>
+            <a:ext cx="4859684" cy="2267712"/>
+          </a:xfrm>
+          <a:prstGeom prst="roundRect">
+            <a:avLst>
+              <a:gd name="adj" fmla="val 3000"/>
+            </a:avLst>
+          </a:prstGeom>
+          <a:noFill/>
+          <a:ln w="12700">
+            <a:solidFill>
+              <a:srgbClr val="1F6F5C"/>
+            </a:solidFill>
+          </a:ln>
+          <a:effectLst/>
+        </p:spPr>
+        <p:style>
+          <a:lnRef idx="1">
+            <a:schemeClr val="accent1"/>
+          </a:lnRef>
+          <a:fillRef idx="3">
+            <a:schemeClr val="accent1"/>
+          </a:fillRef>
+          <a:effectRef idx="2">
+            <a:schemeClr val="accent1"/>
+          </a:effectRef>
+          <a:fontRef idx="minor">
+            <a:schemeClr val="lt1"/>
+          </a:fontRef>
+        </p:style>
+        <p:txBody>
+          <a:bodyPr rtlCol="0" anchor="ctr"/>
+          <a:lstStyle/>
+          <a:p>
+            <a:pPr algn="ctr"/>
+          </a:p>
+        </p:txBody>
+      </p:sp>
+      <p:pic>
+        <p:nvPicPr>
+          <p:cNvPr id="7" name="Picture 6" descr="18-inicio-admin.png"/>
+          <p:cNvPicPr>
+            <a:picLocks noChangeAspect="1"/>
+          </p:cNvPicPr>
+          <p:nvPr/>
+        </p:nvPicPr>
+        <p:blipFill>
+          <a:blip r:embed="rId2"/>
+          <a:stretch>
+            <a:fillRect/>
+          </a:stretch>
+        </p:blipFill>
+        <p:spPr>
+          <a:xfrm>
+            <a:off x="990013" y="1691640"/>
+            <a:ext cx="4786532" cy="2194560"/>
+          </a:xfrm>
+          <a:prstGeom prst="rect">
+            <a:avLst/>
+          </a:prstGeom>
+        </p:spPr>
+      </p:pic>
+      <p:sp>
+        <p:nvSpPr>
+          <p:cNvPr id="10" name="Rounded Rectangle 9"/>
+          <p:cNvSpPr/>
+          <p:nvPr/>
+        </p:nvSpPr>
+        <p:spPr>
+          <a:xfrm>
+            <a:off x="7262487" y="1655064"/>
+            <a:ext cx="3397264" cy="2267712"/>
+          </a:xfrm>
+          <a:prstGeom prst="roundRect">
+            <a:avLst>
+              <a:gd name="adj" fmla="val 3000"/>
+            </a:avLst>
+          </a:prstGeom>
+          <a:noFill/>
+          <a:ln w="12700">
+            <a:solidFill>
+              <a:srgbClr val="1F6F5C"/>
+            </a:solidFill>
+          </a:ln>
+          <a:effectLst/>
+        </p:spPr>
+        <p:style>
+          <a:lnRef idx="1">
+            <a:schemeClr val="accent1"/>
+          </a:lnRef>
+          <a:fillRef idx="3">
+            <a:schemeClr val="accent1"/>
+          </a:fillRef>
+          <a:effectRef idx="2">
+            <a:schemeClr val="accent1"/>
+          </a:effectRef>
+          <a:fontRef idx="minor">
+            <a:schemeClr val="lt1"/>
+          </a:fontRef>
+        </p:style>
+        <p:txBody>
+          <a:bodyPr rtlCol="0" anchor="ctr"/>
+          <a:lstStyle/>
+          <a:p>
+            <a:pPr algn="ctr"/>
+          </a:p>
+        </p:txBody>
+      </p:sp>
+      <p:pic>
+        <p:nvPicPr>
+          <p:cNvPr id="9" name="Picture 8" descr="17-crear-publicacion.png"/>
+          <p:cNvPicPr>
+            <a:picLocks noChangeAspect="1"/>
+          </p:cNvPicPr>
+          <p:nvPr/>
+        </p:nvPicPr>
+        <p:blipFill>
+          <a:blip r:embed="rId3"/>
+          <a:stretch>
+            <a:fillRect/>
+          </a:stretch>
+        </p:blipFill>
+        <p:spPr>
+          <a:xfrm>
+            <a:off x="7299063" y="1691640"/>
+            <a:ext cx="3324112" cy="2194560"/>
+          </a:xfrm>
+          <a:prstGeom prst="rect">
+            <a:avLst/>
+          </a:prstGeom>
+        </p:spPr>
+      </p:pic>
+      <p:sp>
+        <p:nvSpPr>
+          <p:cNvPr id="12" name="Rounded Rectangle 11"/>
+          <p:cNvSpPr/>
+          <p:nvPr/>
+        </p:nvSpPr>
+        <p:spPr>
+          <a:xfrm>
+            <a:off x="1461276" y="3986784"/>
+            <a:ext cx="3844007" cy="2267712"/>
+          </a:xfrm>
+          <a:prstGeom prst="roundRect">
+            <a:avLst>
+              <a:gd name="adj" fmla="val 3000"/>
+            </a:avLst>
+          </a:prstGeom>
+          <a:noFill/>
+          <a:ln w="12700">
+            <a:solidFill>
+              <a:srgbClr val="1F6F5C"/>
+            </a:solidFill>
+          </a:ln>
+          <a:effectLst/>
+        </p:spPr>
+        <p:style>
+          <a:lnRef idx="1">
+            <a:schemeClr val="accent1"/>
+          </a:lnRef>
+          <a:fillRef idx="3">
+            <a:schemeClr val="accent1"/>
+          </a:fillRef>
+          <a:effectRef idx="2">
+            <a:schemeClr val="accent1"/>
+          </a:effectRef>
+          <a:fontRef idx="minor">
+            <a:schemeClr val="lt1"/>
+          </a:fontRef>
+        </p:style>
+        <p:txBody>
+          <a:bodyPr rtlCol="0" anchor="ctr"/>
+          <a:lstStyle/>
+          <a:p>
+            <a:pPr algn="ctr"/>
+          </a:p>
+        </p:txBody>
+      </p:sp>
+      <p:pic>
+        <p:nvPicPr>
+          <p:cNvPr id="11" name="Picture 10" descr="12-contenedor-chat.png"/>
+          <p:cNvPicPr>
+            <a:picLocks noChangeAspect="1"/>
+          </p:cNvPicPr>
+          <p:nvPr/>
+        </p:nvPicPr>
+        <p:blipFill>
+          <a:blip r:embed="rId4"/>
+          <a:stretch>
+            <a:fillRect/>
+          </a:stretch>
+        </p:blipFill>
+        <p:spPr>
+          <a:xfrm>
+            <a:off x="1497852" y="4023360"/>
+            <a:ext cx="3770855" cy="2194560"/>
+          </a:xfrm>
+          <a:prstGeom prst="rect">
+            <a:avLst/>
+          </a:prstGeom>
+        </p:spPr>
+      </p:pic>
+      <p:sp>
+        <p:nvSpPr>
+          <p:cNvPr id="14" name="Rounded Rectangle 13"/>
+          <p:cNvSpPr/>
+          <p:nvPr/>
+        </p:nvSpPr>
+        <p:spPr>
+          <a:xfrm>
+            <a:off x="7284581" y="3986784"/>
+            <a:ext cx="3353076" cy="2267712"/>
+          </a:xfrm>
+          <a:prstGeom prst="roundRect">
+            <a:avLst>
+              <a:gd name="adj" fmla="val 3000"/>
+            </a:avLst>
+          </a:prstGeom>
+          <a:noFill/>
+          <a:ln w="12700">
+            <a:solidFill>
+              <a:srgbClr val="1F6F5C"/>
+            </a:solidFill>
+          </a:ln>
+          <a:effectLst/>
+        </p:spPr>
+        <p:style>
+          <a:lnRef idx="1">
+            <a:schemeClr val="accent1"/>
+          </a:lnRef>
+          <a:fillRef idx="3">
+            <a:schemeClr val="accent1"/>
+          </a:fillRef>
+          <a:effectRef idx="2">
+            <a:schemeClr val="accent1"/>
+          </a:effectRef>
+          <a:fontRef idx="minor">
+            <a:schemeClr val="lt1"/>
+          </a:fontRef>
+        </p:style>
+        <p:txBody>
+          <a:bodyPr rtlCol="0" anchor="ctr"/>
+          <a:lstStyle/>
+          <a:p>
+            <a:pPr algn="ctr"/>
+          </a:p>
+        </p:txBody>
+      </p:sp>
+      <p:pic>
+        <p:nvPicPr>
+          <p:cNvPr id="13" name="Picture 12" descr="15-ventana-nueva.png"/>
+          <p:cNvPicPr>
+            <a:picLocks noChangeAspect="1"/>
+          </p:cNvPicPr>
+          <p:nvPr/>
+        </p:nvPicPr>
+        <p:blipFill>
+          <a:blip r:embed="rId5"/>
+          <a:stretch>
+            <a:fillRect/>
+          </a:stretch>
+        </p:blipFill>
+        <p:spPr>
+          <a:xfrm>
+            <a:off x="7321157" y="4023360"/>
+            <a:ext cx="3279924" cy="2194560"/>
+          </a:xfrm>
+          <a:prstGeom prst="rect">
+            <a:avLst/>
+          </a:prstGeom>
+        </p:spPr>
+      </p:pic>
+    </p:spTree>
+  </p:cSld>
+  <p:clrMapOvr>
+    <a:masterClrMapping/>
+  </p:clrMapOvr>
+</p:sld>
+</file>
+
+<file path=ppt/slides/slide27.xml><?xml version="1.0" encoding="utf-8"?>
+<p:sld xmlns:a="http://schemas.openxmlformats.org/drawingml/2006/main" xmlns:p="http://schemas.openxmlformats.org/presentationml/2006/main" xmlns:r="http://schemas.openxmlformats.org/officeDocument/2006/relationships">
+  <p:cSld>
+    <p:spTree>
+      <p:nvGrpSpPr>
+        <p:cNvPr id="1" name=""/>
+        <p:cNvGrpSpPr/>
+        <p:nvPr/>
+      </p:nvGrpSpPr>
+      <p:grpSpPr/>
+      <p:sp>
+        <p:nvSpPr>
+          <p:cNvPr id="2" name="Rectangle 1"/>
+          <p:cNvSpPr/>
+          <p:nvPr/>
+        </p:nvSpPr>
+        <p:spPr>
+          <a:xfrm>
+            <a:off x="0" y="0"/>
+            <a:ext cx="12191695" cy="6858000"/>
+          </a:xfrm>
+          <a:prstGeom prst="rect">
+            <a:avLst/>
+          </a:prstGeom>
+          <a:solidFill>
             <a:srgbClr val="081412"/>
           </a:solidFill>
           <a:ln>
@@ -12494,7 +14534,7 @@
                 </a:solidFill>
                 <a:latin typeface="Segoe UI"/>
               </a:rPr>
-              <a:t>Universidad Tecnológica de Tula-Tepeji</a:t>
+              <a:t>Universidad Tecnológica de Tecámac</a:t>
             </a:r>
           </a:p>
         </p:txBody>
